--- a/Templates/executive-reporting/cra-executive-summary-v3.pptx
+++ b/Templates/executive-reporting/cra-executive-summary-v3.pptx
@@ -5,6 +5,7 @@
     <p:sldMasterId id="2147483648" r:id="rId1"/>
   </p:sldMasterIdLst>
   <p:sldIdLst>
+    <p:sldId id="298" r:id="rId50"/>
     <p:sldId id="256" r:id="rId7"/>
     <p:sldId id="257" r:id="rId8"/>
     <p:sldId id="258" r:id="rId9"/>
@@ -35,6 +36,18 @@
     <p:sldId id="283" r:id="rId34"/>
     <p:sldId id="284" r:id="rId35"/>
     <p:sldId id="285" r:id="rId36"/>
+    <p:sldId id="286" r:id="rId37"/>
+    <p:sldId id="287" r:id="rId39"/>
+    <p:sldId id="288" r:id="rId40"/>
+    <p:sldId id="289" r:id="rId41"/>
+    <p:sldId id="290" r:id="rId42"/>
+    <p:sldId id="291" r:id="rId43"/>
+    <p:sldId id="292" r:id="rId44"/>
+    <p:sldId id="293" r:id="rId45"/>
+    <p:sldId id="294" r:id="rId46"/>
+    <p:sldId id="295" r:id="rId47"/>
+    <p:sldId id="296" r:id="rId48"/>
+    <p:sldId id="297" r:id="rId49"/>
   </p:sldIdLst>
   <p:sldSz cx="12191695" cy="6858000" type="screen4x3"/>
   <p:notesSz cx="6858000" cy="9144000"/>
@@ -266,6 +279,1196 @@
     <c:autoUpdate val="0"/>
   </c:externalData>
 </c:chartSpace>
+</file>
+
+<file path=ppt/notesMasters/notesMaster1.xml><?xml version="1.0" encoding="utf-8"?>
+<p:notesMaster xmlns:a="http://schemas.openxmlformats.org/drawingml/2006/main" xmlns:p="http://schemas.openxmlformats.org/presentationml/2006/main" xmlns:r="http://schemas.openxmlformats.org/officeDocument/2006/relationships">
+  <p:cSld>
+    <p:bg>
+      <p:bgRef idx="1001">
+        <a:schemeClr val="bg1"/>
+      </p:bgRef>
+    </p:bg>
+    <p:spTree>
+      <p:nvGrpSpPr>
+        <p:cNvPr id="1" name=""/>
+        <p:cNvGrpSpPr/>
+        <p:nvPr/>
+      </p:nvGrpSpPr>
+      <p:grpSpPr>
+        <a:xfrm>
+          <a:off x="0" y="0"/>
+          <a:ext cx="0" cy="0"/>
+          <a:chOff x="0" y="0"/>
+          <a:chExt cx="0" cy="0"/>
+        </a:xfrm>
+      </p:grpSpPr>
+      <p:sp>
+        <p:nvSpPr>
+          <p:cNvPr id="2" name="Header Placeholder 1"/>
+          <p:cNvSpPr>
+            <a:spLocks noGrp="1"/>
+          </p:cNvSpPr>
+          <p:nvPr>
+            <p:ph type="hdr" sz="quarter"/>
+          </p:nvPr>
+        </p:nvSpPr>
+        <p:spPr>
+          <a:xfrm>
+            <a:off x="0" y="0"/>
+            <a:ext cx="2971800" cy="457200"/>
+          </a:xfrm>
+          <a:prstGeom prst="rect">
+            <a:avLst/>
+          </a:prstGeom>
+        </p:spPr>
+        <p:txBody>
+          <a:bodyPr vert="horz" lIns="91440" tIns="45720" rIns="91440" bIns="45720" rtlCol="0"/>
+          <a:lstStyle>
+            <a:lvl1pPr algn="l">
+              <a:defRPr sz="1200"/>
+            </a:lvl1pPr>
+          </a:lstStyle>
+          <a:p>
+            <a:endParaRPr lang="en-US"/>
+          </a:p>
+        </p:txBody>
+      </p:sp>
+      <p:sp>
+        <p:nvSpPr>
+          <p:cNvPr id="3" name="Date Placeholder 2"/>
+          <p:cNvSpPr>
+            <a:spLocks noGrp="1"/>
+          </p:cNvSpPr>
+          <p:nvPr>
+            <p:ph type="dt" idx="1"/>
+          </p:nvPr>
+        </p:nvSpPr>
+        <p:spPr>
+          <a:xfrm>
+            <a:off x="3884613" y="0"/>
+            <a:ext cx="2971800" cy="457200"/>
+          </a:xfrm>
+          <a:prstGeom prst="rect">
+            <a:avLst/>
+          </a:prstGeom>
+        </p:spPr>
+        <p:txBody>
+          <a:bodyPr vert="horz" lIns="91440" tIns="45720" rIns="91440" bIns="45720" rtlCol="0"/>
+          <a:lstStyle>
+            <a:lvl1pPr algn="r">
+              <a:defRPr sz="1200"/>
+            </a:lvl1pPr>
+          </a:lstStyle>
+          <a:p>
+            <a:fld id="{0F89C1C7-3DCD-1040-A9CF-14679D8B5DDD}" type="datetimeFigureOut">
+              <a:rPr lang="en-US" smtClean="0"/>
+              <a:t>10/17/16</a:t>
+            </a:fld>
+            <a:endParaRPr lang="en-US"/>
+          </a:p>
+        </p:txBody>
+      </p:sp>
+      <p:sp>
+        <p:nvSpPr>
+          <p:cNvPr id="4" name="Slide Image Placeholder 3"/>
+          <p:cNvSpPr>
+            <a:spLocks noGrp="1" noRot="1" noChangeAspect="1"/>
+          </p:cNvSpPr>
+          <p:nvPr>
+            <p:ph type="sldImg" idx="2"/>
+          </p:nvPr>
+        </p:nvSpPr>
+        <p:spPr>
+          <a:xfrm>
+            <a:off x="1143000" y="685800"/>
+            <a:ext cx="4572000" cy="3429000"/>
+          </a:xfrm>
+          <a:prstGeom prst="rect">
+            <a:avLst/>
+          </a:prstGeom>
+          <a:noFill/>
+          <a:ln w="12700">
+            <a:solidFill>
+              <a:prstClr val="black"/>
+            </a:solidFill>
+          </a:ln>
+        </p:spPr>
+        <p:txBody>
+          <a:bodyPr vert="horz" lIns="91440" tIns="45720" rIns="91440" bIns="45720" rtlCol="0" anchor="ctr"/>
+          <a:lstStyle/>
+          <a:p>
+            <a:endParaRPr lang="en-US"/>
+          </a:p>
+        </p:txBody>
+      </p:sp>
+      <p:sp>
+        <p:nvSpPr>
+          <p:cNvPr id="5" name="Notes Placeholder 4"/>
+          <p:cNvSpPr>
+            <a:spLocks noGrp="1"/>
+          </p:cNvSpPr>
+          <p:nvPr>
+            <p:ph type="body" sz="quarter" idx="3"/>
+          </p:nvPr>
+        </p:nvSpPr>
+        <p:spPr>
+          <a:xfrm>
+            <a:off x="685800" y="4343400"/>
+            <a:ext cx="5486400" cy="4114800"/>
+          </a:xfrm>
+          <a:prstGeom prst="rect">
+            <a:avLst/>
+          </a:prstGeom>
+        </p:spPr>
+        <p:txBody>
+          <a:bodyPr vert="horz" lIns="91440" tIns="45720" rIns="91440" bIns="45720" rtlCol="0"/>
+          <a:lstStyle/>
+          <a:p>
+            <a:pPr lvl="0"/>
+            <a:r>
+              <a:rPr lang="en-US" smtClean="0"/>
+              <a:t>Click to edit Master text styles</a:t>
+            </a:r>
+          </a:p>
+          <a:p>
+            <a:pPr lvl="1"/>
+            <a:r>
+              <a:rPr lang="en-US" smtClean="0"/>
+              <a:t>Second level</a:t>
+            </a:r>
+          </a:p>
+          <a:p>
+            <a:pPr lvl="2"/>
+            <a:r>
+              <a:rPr lang="en-US" smtClean="0"/>
+              <a:t>Third level</a:t>
+            </a:r>
+          </a:p>
+          <a:p>
+            <a:pPr lvl="3"/>
+            <a:r>
+              <a:rPr lang="en-US" smtClean="0"/>
+              <a:t>Fourth level</a:t>
+            </a:r>
+          </a:p>
+          <a:p>
+            <a:pPr lvl="4"/>
+            <a:r>
+              <a:rPr lang="en-US" smtClean="0"/>
+              <a:t>Fifth level</a:t>
+            </a:r>
+            <a:endParaRPr lang="en-US"/>
+          </a:p>
+        </p:txBody>
+      </p:sp>
+      <p:sp>
+        <p:nvSpPr>
+          <p:cNvPr id="6" name="Footer Placeholder 5"/>
+          <p:cNvSpPr>
+            <a:spLocks noGrp="1"/>
+          </p:cNvSpPr>
+          <p:nvPr>
+            <p:ph type="ftr" sz="quarter" idx="4"/>
+          </p:nvPr>
+        </p:nvSpPr>
+        <p:spPr>
+          <a:xfrm>
+            <a:off x="0" y="8685213"/>
+            <a:ext cx="2971800" cy="457200"/>
+          </a:xfrm>
+          <a:prstGeom prst="rect">
+            <a:avLst/>
+          </a:prstGeom>
+        </p:spPr>
+        <p:txBody>
+          <a:bodyPr vert="horz" lIns="91440" tIns="45720" rIns="91440" bIns="45720" rtlCol="0" anchor="b"/>
+          <a:lstStyle>
+            <a:lvl1pPr algn="l">
+              <a:defRPr sz="1200"/>
+            </a:lvl1pPr>
+          </a:lstStyle>
+          <a:p>
+            <a:endParaRPr lang="en-US"/>
+          </a:p>
+        </p:txBody>
+      </p:sp>
+      <p:sp>
+        <p:nvSpPr>
+          <p:cNvPr id="7" name="Slide Number Placeholder 6"/>
+          <p:cNvSpPr>
+            <a:spLocks noGrp="1"/>
+          </p:cNvSpPr>
+          <p:nvPr>
+            <p:ph type="sldNum" sz="quarter" idx="5"/>
+          </p:nvPr>
+        </p:nvSpPr>
+        <p:spPr>
+          <a:xfrm>
+            <a:off x="3884613" y="8685213"/>
+            <a:ext cx="2971800" cy="457200"/>
+          </a:xfrm>
+          <a:prstGeom prst="rect">
+            <a:avLst/>
+          </a:prstGeom>
+        </p:spPr>
+        <p:txBody>
+          <a:bodyPr vert="horz" lIns="91440" tIns="45720" rIns="91440" bIns="45720" rtlCol="0" anchor="b"/>
+          <a:lstStyle>
+            <a:lvl1pPr algn="r">
+              <a:defRPr sz="1200"/>
+            </a:lvl1pPr>
+          </a:lstStyle>
+          <a:p>
+            <a:fld id="{BB5E49A5-4136-284D-997B-48E1D791AD67}" type="slidenum">
+              <a:rPr lang="en-US" smtClean="0"/>
+              <a:t>‹#›</a:t>
+            </a:fld>
+            <a:endParaRPr lang="en-US"/>
+          </a:p>
+        </p:txBody>
+      </p:sp>
+    </p:spTree>
+    <p:extLst>
+      <p:ext uri="{BB962C8B-B14F-4D97-AF65-F5344CB8AC3E}">
+        <p14:creationId xmlns:p14="http://schemas.microsoft.com/office/powerpoint/2010/main" val="2623252185"/>
+      </p:ext>
+    </p:extLst>
+  </p:cSld>
+  <p:clrMap bg1="lt1" tx1="dk1" bg2="lt2" tx2="dk2" accent1="accent1" accent2="accent2" accent3="accent3" accent4="accent4" accent5="accent5" accent6="accent6" hlink="hlink" folHlink="folHlink"/>
+  <p:notesStyle>
+    <a:lvl1pPr marL="0" algn="l" defTabSz="457200" rtl="0" eaLnBrk="1" latinLnBrk="0" hangingPunct="1">
+      <a:defRPr sz="1200" kern="1200">
+        <a:solidFill>
+          <a:schemeClr val="tx1"/>
+        </a:solidFill>
+        <a:latin typeface="+mn-lt"/>
+        <a:ea typeface="+mn-ea"/>
+        <a:cs typeface="+mn-cs"/>
+      </a:defRPr>
+    </a:lvl1pPr>
+    <a:lvl2pPr marL="457200" algn="l" defTabSz="457200" rtl="0" eaLnBrk="1" latinLnBrk="0" hangingPunct="1">
+      <a:defRPr sz="1200" kern="1200">
+        <a:solidFill>
+          <a:schemeClr val="tx1"/>
+        </a:solidFill>
+        <a:latin typeface="+mn-lt"/>
+        <a:ea typeface="+mn-ea"/>
+        <a:cs typeface="+mn-cs"/>
+      </a:defRPr>
+    </a:lvl2pPr>
+    <a:lvl3pPr marL="914400" algn="l" defTabSz="457200" rtl="0" eaLnBrk="1" latinLnBrk="0" hangingPunct="1">
+      <a:defRPr sz="1200" kern="1200">
+        <a:solidFill>
+          <a:schemeClr val="tx1"/>
+        </a:solidFill>
+        <a:latin typeface="+mn-lt"/>
+        <a:ea typeface="+mn-ea"/>
+        <a:cs typeface="+mn-cs"/>
+      </a:defRPr>
+    </a:lvl3pPr>
+    <a:lvl4pPr marL="1371600" algn="l" defTabSz="457200" rtl="0" eaLnBrk="1" latinLnBrk="0" hangingPunct="1">
+      <a:defRPr sz="1200" kern="1200">
+        <a:solidFill>
+          <a:schemeClr val="tx1"/>
+        </a:solidFill>
+        <a:latin typeface="+mn-lt"/>
+        <a:ea typeface="+mn-ea"/>
+        <a:cs typeface="+mn-cs"/>
+      </a:defRPr>
+    </a:lvl4pPr>
+    <a:lvl5pPr marL="1828800" algn="l" defTabSz="457200" rtl="0" eaLnBrk="1" latinLnBrk="0" hangingPunct="1">
+      <a:defRPr sz="1200" kern="1200">
+        <a:solidFill>
+          <a:schemeClr val="tx1"/>
+        </a:solidFill>
+        <a:latin typeface="+mn-lt"/>
+        <a:ea typeface="+mn-ea"/>
+        <a:cs typeface="+mn-cs"/>
+      </a:defRPr>
+    </a:lvl5pPr>
+    <a:lvl6pPr marL="2286000" algn="l" defTabSz="457200" rtl="0" eaLnBrk="1" latinLnBrk="0" hangingPunct="1">
+      <a:defRPr sz="1200" kern="1200">
+        <a:solidFill>
+          <a:schemeClr val="tx1"/>
+        </a:solidFill>
+        <a:latin typeface="+mn-lt"/>
+        <a:ea typeface="+mn-ea"/>
+        <a:cs typeface="+mn-cs"/>
+      </a:defRPr>
+    </a:lvl6pPr>
+    <a:lvl7pPr marL="2743200" algn="l" defTabSz="457200" rtl="0" eaLnBrk="1" latinLnBrk="0" hangingPunct="1">
+      <a:defRPr sz="1200" kern="1200">
+        <a:solidFill>
+          <a:schemeClr val="tx1"/>
+        </a:solidFill>
+        <a:latin typeface="+mn-lt"/>
+        <a:ea typeface="+mn-ea"/>
+        <a:cs typeface="+mn-cs"/>
+      </a:defRPr>
+    </a:lvl7pPr>
+    <a:lvl8pPr marL="3200400" algn="l" defTabSz="457200" rtl="0" eaLnBrk="1" latinLnBrk="0" hangingPunct="1">
+      <a:defRPr sz="1200" kern="1200">
+        <a:solidFill>
+          <a:schemeClr val="tx1"/>
+        </a:solidFill>
+        <a:latin typeface="+mn-lt"/>
+        <a:ea typeface="+mn-ea"/>
+        <a:cs typeface="+mn-cs"/>
+      </a:defRPr>
+    </a:lvl8pPr>
+    <a:lvl9pPr marL="3657600" algn="l" defTabSz="457200" rtl="0" eaLnBrk="1" latinLnBrk="0" hangingPunct="1">
+      <a:defRPr sz="1200" kern="1200">
+        <a:solidFill>
+          <a:schemeClr val="tx1"/>
+        </a:solidFill>
+        <a:latin typeface="+mn-lt"/>
+        <a:ea typeface="+mn-ea"/>
+        <a:cs typeface="+mn-cs"/>
+      </a:defRPr>
+    </a:lvl9pPr>
+  </p:notesStyle>
+</p:notesMaster>
+</file>
+
+<file path=ppt/notesSlides/notesSlide1.xml><?xml version="1.0" encoding="utf-8"?>
+<p:notes xmlns:a="http://schemas.openxmlformats.org/drawingml/2006/main" xmlns:p="http://schemas.openxmlformats.org/presentationml/2006/main" xmlns:r="http://schemas.openxmlformats.org/officeDocument/2006/relationships">
+  <p:cSld>
+    <p:spTree>
+      <p:nvGrpSpPr>
+        <p:cNvPr id="1" name=""/>
+        <p:cNvGrpSpPr/>
+        <p:nvPr/>
+      </p:nvGrpSpPr>
+      <p:grpSpPr>
+        <a:xfrm>
+          <a:off x="0" y="0"/>
+          <a:ext cx="0" cy="0"/>
+          <a:chOff x="0" y="0"/>
+          <a:chExt cx="0" cy="0"/>
+        </a:xfrm>
+      </p:grpSpPr>
+      <p:sp>
+        <p:nvSpPr>
+          <p:cNvPr id="2" name="Slide Image Placeholder 1"/>
+          <p:cNvSpPr>
+            <a:spLocks noGrp="1"/>
+          </p:cNvSpPr>
+          <p:nvPr>
+            <p:ph type="sldImg" idx="2"/>
+          </p:nvPr>
+        </p:nvSpPr>
+        <p:spPr/>
+      </p:sp>
+      <p:sp>
+        <p:nvSpPr>
+          <p:cNvPr id="3" name="Notes Placeholder 2"/>
+          <p:cNvSpPr>
+            <a:spLocks noGrp="1"/>
+          </p:cNvSpPr>
+          <p:nvPr>
+            <p:ph type="body" idx="3" sz="quarter"/>
+          </p:nvPr>
+        </p:nvSpPr>
+        <p:spPr/>
+        <p:txBody>
+          <a:bodyPr/>
+          <a:lstStyle/>
+          <a:p>
+            <a:r>
+              <a:t>State what was in scope: application count, VM count, DC count, duration. Also state the scope confidence level (High/Medium/Low) and any late-breaking scope changes (e.g., a 57% variance like the DMG Media UK engagement).</a:t>
+            </a:r>
+          </a:p>
+        </p:txBody>
+      </p:sp>
+      <p:sp>
+        <p:nvSpPr>
+          <p:cNvPr id="4" name="Slide Number Placeholder 3"/>
+          <p:cNvSpPr>
+            <a:spLocks noGrp="1"/>
+          </p:cNvSpPr>
+          <p:nvPr>
+            <p:ph type="sldNum" idx="5" sz="quarter"/>
+          </p:nvPr>
+        </p:nvSpPr>
+        <p:spPr/>
+      </p:sp>
+    </p:spTree>
+  </p:cSld>
+  <p:clrMapOvr>
+    <a:masterClrMapping/>
+  </p:clrMapOvr>
+</p:notes>
+</file>
+
+<file path=ppt/notesSlides/notesSlide10.xml><?xml version="1.0" encoding="utf-8"?>
+<p:notes xmlns:a="http://schemas.openxmlformats.org/drawingml/2006/main" xmlns:p="http://schemas.openxmlformats.org/presentationml/2006/main" xmlns:r="http://schemas.openxmlformats.org/officeDocument/2006/relationships">
+  <p:cSld>
+    <p:spTree>
+      <p:nvGrpSpPr>
+        <p:cNvPr id="1" name=""/>
+        <p:cNvGrpSpPr/>
+        <p:nvPr/>
+      </p:nvGrpSpPr>
+      <p:grpSpPr>
+        <a:xfrm>
+          <a:off x="0" y="0"/>
+          <a:ext cx="0" cy="0"/>
+          <a:chOff x="0" y="0"/>
+          <a:chExt cx="0" cy="0"/>
+        </a:xfrm>
+      </p:grpSpPr>
+      <p:sp>
+        <p:nvSpPr>
+          <p:cNvPr id="2" name="Slide Image Placeholder 1"/>
+          <p:cNvSpPr>
+            <a:spLocks noGrp="1"/>
+          </p:cNvSpPr>
+          <p:nvPr>
+            <p:ph type="sldImg" idx="2"/>
+          </p:nvPr>
+        </p:nvSpPr>
+        <p:spPr/>
+      </p:sp>
+      <p:sp>
+        <p:nvSpPr>
+          <p:cNvPr id="3" name="Notes Placeholder 2"/>
+          <p:cNvSpPr>
+            <a:spLocks noGrp="1"/>
+          </p:cNvSpPr>
+          <p:nvPr>
+            <p:ph type="body" idx="3" sz="quarter"/>
+          </p:nvPr>
+        </p:nvSpPr>
+        <p:spPr/>
+        <p:txBody>
+          <a:bodyPr/>
+          <a:lstStyle/>
+          <a:p>
+            <a:r>
+              <a:t>AMM/MAP/PSO registration timeline. Show that deal registration was (or will be) completed before Part 2 SOW countersignature. This protects partner funding.</a:t>
+            </a:r>
+          </a:p>
+        </p:txBody>
+      </p:sp>
+      <p:sp>
+        <p:nvSpPr>
+          <p:cNvPr id="4" name="Slide Number Placeholder 3"/>
+          <p:cNvSpPr>
+            <a:spLocks noGrp="1"/>
+          </p:cNvSpPr>
+          <p:nvPr>
+            <p:ph type="sldNum" idx="5" sz="quarter"/>
+          </p:nvPr>
+        </p:nvSpPr>
+        <p:spPr/>
+      </p:sp>
+    </p:spTree>
+  </p:cSld>
+  <p:clrMapOvr>
+    <a:masterClrMapping/>
+  </p:clrMapOvr>
+</p:notes>
+</file>
+
+<file path=ppt/notesSlides/notesSlide11.xml><?xml version="1.0" encoding="utf-8"?>
+<p:notes xmlns:a="http://schemas.openxmlformats.org/drawingml/2006/main" xmlns:p="http://schemas.openxmlformats.org/presentationml/2006/main" xmlns:r="http://schemas.openxmlformats.org/officeDocument/2006/relationships">
+  <p:cSld>
+    <p:spTree>
+      <p:nvGrpSpPr>
+        <p:cNvPr id="1" name=""/>
+        <p:cNvGrpSpPr/>
+        <p:nvPr/>
+      </p:nvGrpSpPr>
+      <p:grpSpPr>
+        <a:xfrm>
+          <a:off x="0" y="0"/>
+          <a:ext cx="0" cy="0"/>
+          <a:chOff x="0" y="0"/>
+          <a:chExt cx="0" cy="0"/>
+        </a:xfrm>
+      </p:grpSpPr>
+      <p:sp>
+        <p:nvSpPr>
+          <p:cNvPr id="2" name="Slide Image Placeholder 1"/>
+          <p:cNvSpPr>
+            <a:spLocks noGrp="1"/>
+          </p:cNvSpPr>
+          <p:nvPr>
+            <p:ph type="sldImg" idx="2"/>
+          </p:nvPr>
+        </p:nvSpPr>
+        <p:spPr/>
+      </p:sp>
+      <p:sp>
+        <p:nvSpPr>
+          <p:cNvPr id="3" name="Notes Placeholder 2"/>
+          <p:cNvSpPr>
+            <a:spLocks noGrp="1"/>
+          </p:cNvSpPr>
+          <p:nvPr>
+            <p:ph type="body" idx="3" sz="quarter"/>
+          </p:nvPr>
+        </p:nvSpPr>
+        <p:spPr/>
+        <p:txBody>
+          <a:bodyPr/>
+          <a:lstStyle/>
+          <a:p>
+            <a:r>
+              <a:t>Part 2 scope, indicative investment range (pre-approved by Pre-Sales Director), timeline, and next steps. The customer should be able to decide at this meeting whether to proceed.</a:t>
+            </a:r>
+          </a:p>
+        </p:txBody>
+      </p:sp>
+      <p:sp>
+        <p:nvSpPr>
+          <p:cNvPr id="4" name="Slide Number Placeholder 3"/>
+          <p:cNvSpPr>
+            <a:spLocks noGrp="1"/>
+          </p:cNvSpPr>
+          <p:nvPr>
+            <p:ph type="sldNum" idx="5" sz="quarter"/>
+          </p:nvPr>
+        </p:nvSpPr>
+        <p:spPr/>
+      </p:sp>
+    </p:spTree>
+  </p:cSld>
+  <p:clrMapOvr>
+    <a:masterClrMapping/>
+  </p:clrMapOvr>
+</p:notes>
+</file>
+
+<file path=ppt/notesSlides/notesSlide12.xml><?xml version="1.0" encoding="utf-8"?>
+<p:notes xmlns:a="http://schemas.openxmlformats.org/drawingml/2006/main" xmlns:p="http://schemas.openxmlformats.org/presentationml/2006/main" xmlns:r="http://schemas.openxmlformats.org/officeDocument/2006/relationships">
+  <p:cSld>
+    <p:spTree>
+      <p:nvGrpSpPr>
+        <p:cNvPr id="1" name=""/>
+        <p:cNvGrpSpPr/>
+        <p:nvPr/>
+      </p:nvGrpSpPr>
+      <p:grpSpPr>
+        <a:xfrm>
+          <a:off x="0" y="0"/>
+          <a:ext cx="0" cy="0"/>
+          <a:chOff x="0" y="0"/>
+          <a:chExt cx="0" cy="0"/>
+        </a:xfrm>
+      </p:grpSpPr>
+      <p:sp>
+        <p:nvSpPr>
+          <p:cNvPr id="2" name="Slide Image Placeholder 1"/>
+          <p:cNvSpPr>
+            <a:spLocks noGrp="1"/>
+          </p:cNvSpPr>
+          <p:nvPr>
+            <p:ph type="sldImg" idx="2"/>
+          </p:nvPr>
+        </p:nvSpPr>
+        <p:spPr/>
+      </p:sp>
+      <p:sp>
+        <p:nvSpPr>
+          <p:cNvPr id="3" name="Notes Placeholder 2"/>
+          <p:cNvSpPr>
+            <a:spLocks noGrp="1"/>
+          </p:cNvSpPr>
+          <p:nvPr>
+            <p:ph type="body" idx="3" sz="quarter"/>
+          </p:nvPr>
+        </p:nvSpPr>
+        <p:spPr/>
+        <p:txBody>
+          <a:bodyPr/>
+          <a:lstStyle/>
+          <a:p>
+            <a:r>
+              <a:t>CTA: who needs to sign what by when. Immediate actions (alliance registration, Part 2 kickoff date, AMM submission). Leave 15-20 min for Q&amp;A.</a:t>
+            </a:r>
+          </a:p>
+        </p:txBody>
+      </p:sp>
+      <p:sp>
+        <p:nvSpPr>
+          <p:cNvPr id="4" name="Slide Number Placeholder 3"/>
+          <p:cNvSpPr>
+            <a:spLocks noGrp="1"/>
+          </p:cNvSpPr>
+          <p:nvPr>
+            <p:ph type="sldNum" idx="5" sz="quarter"/>
+          </p:nvPr>
+        </p:nvSpPr>
+        <p:spPr/>
+      </p:sp>
+    </p:spTree>
+  </p:cSld>
+  <p:clrMapOvr>
+    <a:masterClrMapping/>
+  </p:clrMapOvr>
+</p:notes>
+</file>
+
+<file path=ppt/notesSlides/notesSlide2.xml><?xml version="1.0" encoding="utf-8"?>
+<p:notes xmlns:a="http://schemas.openxmlformats.org/drawingml/2006/main" xmlns:p="http://schemas.openxmlformats.org/presentationml/2006/main" xmlns:r="http://schemas.openxmlformats.org/officeDocument/2006/relationships">
+  <p:cSld>
+    <p:spTree>
+      <p:nvGrpSpPr>
+        <p:cNvPr id="1" name=""/>
+        <p:cNvGrpSpPr/>
+        <p:nvPr/>
+      </p:nvGrpSpPr>
+      <p:grpSpPr>
+        <a:xfrm>
+          <a:off x="0" y="0"/>
+          <a:ext cx="0" cy="0"/>
+          <a:chOff x="0" y="0"/>
+          <a:chExt cx="0" cy="0"/>
+        </a:xfrm>
+      </p:grpSpPr>
+      <p:sp>
+        <p:nvSpPr>
+          <p:cNvPr id="2" name="Slide Image Placeholder 1"/>
+          <p:cNvSpPr>
+            <a:spLocks noGrp="1"/>
+          </p:cNvSpPr>
+          <p:nvPr>
+            <p:ph type="sldImg" idx="2"/>
+          </p:nvPr>
+        </p:nvSpPr>
+        <p:spPr/>
+      </p:sp>
+      <p:sp>
+        <p:nvSpPr>
+          <p:cNvPr id="3" name="Notes Placeholder 2"/>
+          <p:cNvSpPr>
+            <a:spLocks noGrp="1"/>
+          </p:cNvSpPr>
+          <p:nvPr>
+            <p:ph type="body" idx="3" sz="quarter"/>
+          </p:nvPr>
+        </p:nvSpPr>
+        <p:spPr/>
+        <p:txBody>
+          <a:bodyPr/>
+          <a:lstStyle/>
+          <a:p>
+            <a:r>
+              <a:t>Show the CRA four-phase diagram. State the discovery tooling used (GCP Migration Center, RVTools, Azure Migrate, etc.) and the data quality grade.</a:t>
+            </a:r>
+          </a:p>
+        </p:txBody>
+      </p:sp>
+      <p:sp>
+        <p:nvSpPr>
+          <p:cNvPr id="4" name="Slide Number Placeholder 3"/>
+          <p:cNvSpPr>
+            <a:spLocks noGrp="1"/>
+          </p:cNvSpPr>
+          <p:nvPr>
+            <p:ph type="sldNum" idx="5" sz="quarter"/>
+          </p:nvPr>
+        </p:nvSpPr>
+        <p:spPr/>
+      </p:sp>
+    </p:spTree>
+  </p:cSld>
+  <p:clrMapOvr>
+    <a:masterClrMapping/>
+  </p:clrMapOvr>
+</p:notes>
+</file>
+
+<file path=ppt/notesSlides/notesSlide3.xml><?xml version="1.0" encoding="utf-8"?>
+<p:notes xmlns:a="http://schemas.openxmlformats.org/drawingml/2006/main" xmlns:p="http://schemas.openxmlformats.org/presentationml/2006/main" xmlns:r="http://schemas.openxmlformats.org/officeDocument/2006/relationships">
+  <p:cSld>
+    <p:spTree>
+      <p:nvGrpSpPr>
+        <p:cNvPr id="1" name=""/>
+        <p:cNvGrpSpPr/>
+        <p:nvPr/>
+      </p:nvGrpSpPr>
+      <p:grpSpPr>
+        <a:xfrm>
+          <a:off x="0" y="0"/>
+          <a:ext cx="0" cy="0"/>
+          <a:chOff x="0" y="0"/>
+          <a:chExt cx="0" cy="0"/>
+        </a:xfrm>
+      </p:grpSpPr>
+      <p:sp>
+        <p:nvSpPr>
+          <p:cNvPr id="2" name="Slide Image Placeholder 1"/>
+          <p:cNvSpPr>
+            <a:spLocks noGrp="1"/>
+          </p:cNvSpPr>
+          <p:nvPr>
+            <p:ph type="sldImg" idx="2"/>
+          </p:nvPr>
+        </p:nvSpPr>
+        <p:spPr/>
+      </p:sp>
+      <p:sp>
+        <p:nvSpPr>
+          <p:cNvPr id="3" name="Notes Placeholder 2"/>
+          <p:cNvSpPr>
+            <a:spLocks noGrp="1"/>
+          </p:cNvSpPr>
+          <p:nvPr>
+            <p:ph type="body" idx="3" sz="quarter"/>
+          </p:nvPr>
+        </p:nvSpPr>
+        <p:spPr/>
+        <p:txBody>
+          <a:bodyPr/>
+          <a:lstStyle/>
+          <a:p>
+            <a:r>
+              <a:t>VM count by OS / hypervisor / size tier. Highlight EoL OS flags. Link to Appendix for full detail.</a:t>
+            </a:r>
+          </a:p>
+        </p:txBody>
+      </p:sp>
+      <p:sp>
+        <p:nvSpPr>
+          <p:cNvPr id="4" name="Slide Number Placeholder 3"/>
+          <p:cNvSpPr>
+            <a:spLocks noGrp="1"/>
+          </p:cNvSpPr>
+          <p:nvPr>
+            <p:ph type="sldNum" idx="5" sz="quarter"/>
+          </p:nvPr>
+        </p:nvSpPr>
+        <p:spPr/>
+      </p:sp>
+    </p:spTree>
+  </p:cSld>
+  <p:clrMapOvr>
+    <a:masterClrMapping/>
+  </p:clrMapOvr>
+</p:notes>
+</file>
+
+<file path=ppt/notesSlides/notesSlide4.xml><?xml version="1.0" encoding="utf-8"?>
+<p:notes xmlns:a="http://schemas.openxmlformats.org/drawingml/2006/main" xmlns:p="http://schemas.openxmlformats.org/presentationml/2006/main" xmlns:r="http://schemas.openxmlformats.org/officeDocument/2006/relationships">
+  <p:cSld>
+    <p:spTree>
+      <p:nvGrpSpPr>
+        <p:cNvPr id="1" name=""/>
+        <p:cNvGrpSpPr/>
+        <p:nvPr/>
+      </p:nvGrpSpPr>
+      <p:grpSpPr>
+        <a:xfrm>
+          <a:off x="0" y="0"/>
+          <a:ext cx="0" cy="0"/>
+          <a:chOff x="0" y="0"/>
+          <a:chExt cx="0" cy="0"/>
+        </a:xfrm>
+      </p:grpSpPr>
+      <p:sp>
+        <p:nvSpPr>
+          <p:cNvPr id="2" name="Slide Image Placeholder 1"/>
+          <p:cNvSpPr>
+            <a:spLocks noGrp="1"/>
+          </p:cNvSpPr>
+          <p:nvPr>
+            <p:ph type="sldImg" idx="2"/>
+          </p:nvPr>
+        </p:nvSpPr>
+        <p:spPr/>
+      </p:sp>
+      <p:sp>
+        <p:nvSpPr>
+          <p:cNvPr id="3" name="Notes Placeholder 2"/>
+          <p:cNvSpPr>
+            <a:spLocks noGrp="1"/>
+          </p:cNvSpPr>
+          <p:nvPr>
+            <p:ph type="body" idx="3" sz="quarter"/>
+          </p:nvPr>
+        </p:nvSpPr>
+        <p:spPr/>
+        <p:txBody>
+          <a:bodyPr/>
+          <a:lstStyle/>
+          <a:p>
+            <a:r>
+              <a:t>App count by criticality (P1/P2/P3). Tech stack distribution. Highlight Oracle RAC and OSS licensing risks if present.</a:t>
+            </a:r>
+          </a:p>
+        </p:txBody>
+      </p:sp>
+      <p:sp>
+        <p:nvSpPr>
+          <p:cNvPr id="4" name="Slide Number Placeholder 3"/>
+          <p:cNvSpPr>
+            <a:spLocks noGrp="1"/>
+          </p:cNvSpPr>
+          <p:nvPr>
+            <p:ph type="sldNum" idx="5" sz="quarter"/>
+          </p:nvPr>
+        </p:nvSpPr>
+        <p:spPr/>
+      </p:sp>
+    </p:spTree>
+  </p:cSld>
+  <p:clrMapOvr>
+    <a:masterClrMapping/>
+  </p:clrMapOvr>
+</p:notes>
+</file>
+
+<file path=ppt/notesSlides/notesSlide5.xml><?xml version="1.0" encoding="utf-8"?>
+<p:notes xmlns:a="http://schemas.openxmlformats.org/drawingml/2006/main" xmlns:p="http://schemas.openxmlformats.org/presentationml/2006/main" xmlns:r="http://schemas.openxmlformats.org/officeDocument/2006/relationships">
+  <p:cSld>
+    <p:spTree>
+      <p:nvGrpSpPr>
+        <p:cNvPr id="1" name=""/>
+        <p:cNvGrpSpPr/>
+        <p:nvPr/>
+      </p:nvGrpSpPr>
+      <p:grpSpPr>
+        <a:xfrm>
+          <a:off x="0" y="0"/>
+          <a:ext cx="0" cy="0"/>
+          <a:chOff x="0" y="0"/>
+          <a:chExt cx="0" cy="0"/>
+        </a:xfrm>
+      </p:grpSpPr>
+      <p:sp>
+        <p:nvSpPr>
+          <p:cNvPr id="2" name="Slide Image Placeholder 1"/>
+          <p:cNvSpPr>
+            <a:spLocks noGrp="1"/>
+          </p:cNvSpPr>
+          <p:nvPr>
+            <p:ph type="sldImg" idx="2"/>
+          </p:nvPr>
+        </p:nvSpPr>
+        <p:spPr/>
+      </p:sp>
+      <p:sp>
+        <p:nvSpPr>
+          <p:cNvPr id="3" name="Notes Placeholder 2"/>
+          <p:cNvSpPr>
+            <a:spLocks noGrp="1"/>
+          </p:cNvSpPr>
+          <p:nvPr>
+            <p:ph type="body" idx="3" sz="quarter"/>
+          </p:nvPr>
+        </p:nvSpPr>
+        <p:spPr/>
+        <p:txBody>
+          <a:bodyPr/>
+          <a:lstStyle/>
+          <a:p>
+            <a:r>
+              <a:t>Show the readiness distribution: Cloud Ready / Cloud Friendly / Cloud Challenged / Blocked. Bar chart is clearest. Call out the % that requires re-architecture.</a:t>
+            </a:r>
+          </a:p>
+        </p:txBody>
+      </p:sp>
+      <p:sp>
+        <p:nvSpPr>
+          <p:cNvPr id="4" name="Slide Number Placeholder 3"/>
+          <p:cNvSpPr>
+            <a:spLocks noGrp="1"/>
+          </p:cNvSpPr>
+          <p:nvPr>
+            <p:ph type="sldNum" idx="5" sz="quarter"/>
+          </p:nvPr>
+        </p:nvSpPr>
+        <p:spPr/>
+      </p:sp>
+    </p:spTree>
+  </p:cSld>
+  <p:clrMapOvr>
+    <a:masterClrMapping/>
+  </p:clrMapOvr>
+</p:notes>
+</file>
+
+<file path=ppt/notesSlides/notesSlide6.xml><?xml version="1.0" encoding="utf-8"?>
+<p:notes xmlns:a="http://schemas.openxmlformats.org/drawingml/2006/main" xmlns:p="http://schemas.openxmlformats.org/presentationml/2006/main" xmlns:r="http://schemas.openxmlformats.org/officeDocument/2006/relationships">
+  <p:cSld>
+    <p:spTree>
+      <p:nvGrpSpPr>
+        <p:cNvPr id="1" name=""/>
+        <p:cNvGrpSpPr/>
+        <p:nvPr/>
+      </p:nvGrpSpPr>
+      <p:grpSpPr>
+        <a:xfrm>
+          <a:off x="0" y="0"/>
+          <a:ext cx="0" cy="0"/>
+          <a:chOff x="0" y="0"/>
+          <a:chExt cx="0" cy="0"/>
+        </a:xfrm>
+      </p:grpSpPr>
+      <p:sp>
+        <p:nvSpPr>
+          <p:cNvPr id="2" name="Slide Image Placeholder 1"/>
+          <p:cNvSpPr>
+            <a:spLocks noGrp="1"/>
+          </p:cNvSpPr>
+          <p:nvPr>
+            <p:ph type="sldImg" idx="2"/>
+          </p:nvPr>
+        </p:nvSpPr>
+        <p:spPr/>
+      </p:sp>
+      <p:sp>
+        <p:nvSpPr>
+          <p:cNvPr id="3" name="Notes Placeholder 2"/>
+          <p:cNvSpPr>
+            <a:spLocks noGrp="1"/>
+          </p:cNvSpPr>
+          <p:nvPr>
+            <p:ph type="body" idx="3" sz="quarter"/>
+          </p:nvPr>
+        </p:nvSpPr>
+        <p:spPr/>
+        <p:txBody>
+          <a:bodyPr/>
+          <a:lstStyle/>
+          <a:p>
+            <a:r>
+              <a:t>Three-year comparison chart. Show on-prem status quo vs Azure vs AWS vs GCP. Ensure on-prem baseline INCLUDES ESU costs and hardware refresh. Show Year 1 dual-running cost. Year 1 dual-running is often 15-25% higher than steady state.</a:t>
+            </a:r>
+          </a:p>
+        </p:txBody>
+      </p:sp>
+      <p:sp>
+        <p:nvSpPr>
+          <p:cNvPr id="4" name="Slide Number Placeholder 3"/>
+          <p:cNvSpPr>
+            <a:spLocks noGrp="1"/>
+          </p:cNvSpPr>
+          <p:nvPr>
+            <p:ph type="sldNum" idx="5" sz="quarter"/>
+          </p:nvPr>
+        </p:nvSpPr>
+        <p:spPr/>
+      </p:sp>
+    </p:spTree>
+  </p:cSld>
+  <p:clrMapOvr>
+    <a:masterClrMapping/>
+  </p:clrMapOvr>
+</p:notes>
+</file>
+
+<file path=ppt/notesSlides/notesSlide7.xml><?xml version="1.0" encoding="utf-8"?>
+<p:notes xmlns:a="http://schemas.openxmlformats.org/drawingml/2006/main" xmlns:p="http://schemas.openxmlformats.org/presentationml/2006/main" xmlns:r="http://schemas.openxmlformats.org/officeDocument/2006/relationships">
+  <p:cSld>
+    <p:spTree>
+      <p:nvGrpSpPr>
+        <p:cNvPr id="1" name=""/>
+        <p:cNvGrpSpPr/>
+        <p:nvPr/>
+      </p:nvGrpSpPr>
+      <p:grpSpPr>
+        <a:xfrm>
+          <a:off x="0" y="0"/>
+          <a:ext cx="0" cy="0"/>
+          <a:chOff x="0" y="0"/>
+          <a:chExt cx="0" cy="0"/>
+        </a:xfrm>
+      </p:grpSpPr>
+      <p:sp>
+        <p:nvSpPr>
+          <p:cNvPr id="2" name="Slide Image Placeholder 1"/>
+          <p:cNvSpPr>
+            <a:spLocks noGrp="1"/>
+          </p:cNvSpPr>
+          <p:nvPr>
+            <p:ph type="sldImg" idx="2"/>
+          </p:nvPr>
+        </p:nvSpPr>
+        <p:spPr/>
+      </p:sp>
+      <p:sp>
+        <p:nvSpPr>
+          <p:cNvPr id="3" name="Notes Placeholder 2"/>
+          <p:cNvSpPr>
+            <a:spLocks noGrp="1"/>
+          </p:cNvSpPr>
+          <p:nvPr>
+            <p:ph type="body" idx="3" sz="quarter"/>
+          </p:nvPr>
+        </p:nvSpPr>
+        <p:spPr/>
+        <p:txBody>
+          <a:bodyPr/>
+          <a:lstStyle/>
+          <a:p>
+            <a:r>
+              <a:t>Show AHB impact (Windows + SQL Server count and £/$ saving). Show Oracle BYOL options. Show net TCO AFTER licensing overlay. This is often the slide that changes the recommendation relative to pure compute cost.</a:t>
+            </a:r>
+          </a:p>
+        </p:txBody>
+      </p:sp>
+      <p:sp>
+        <p:nvSpPr>
+          <p:cNvPr id="4" name="Slide Number Placeholder 3"/>
+          <p:cNvSpPr>
+            <a:spLocks noGrp="1"/>
+          </p:cNvSpPr>
+          <p:nvPr>
+            <p:ph type="sldNum" idx="5" sz="quarter"/>
+          </p:nvPr>
+        </p:nvSpPr>
+        <p:spPr/>
+      </p:sp>
+    </p:spTree>
+  </p:cSld>
+  <p:clrMapOvr>
+    <a:masterClrMapping/>
+  </p:clrMapOvr>
+</p:notes>
+</file>
+
+<file path=ppt/notesSlides/notesSlide8.xml><?xml version="1.0" encoding="utf-8"?>
+<p:notes xmlns:a="http://schemas.openxmlformats.org/drawingml/2006/main" xmlns:p="http://schemas.openxmlformats.org/presentationml/2006/main" xmlns:r="http://schemas.openxmlformats.org/officeDocument/2006/relationships">
+  <p:cSld>
+    <p:spTree>
+      <p:nvGrpSpPr>
+        <p:cNvPr id="1" name=""/>
+        <p:cNvGrpSpPr/>
+        <p:nvPr/>
+      </p:nvGrpSpPr>
+      <p:grpSpPr>
+        <a:xfrm>
+          <a:off x="0" y="0"/>
+          <a:ext cx="0" cy="0"/>
+          <a:chOff x="0" y="0"/>
+          <a:chExt cx="0" cy="0"/>
+        </a:xfrm>
+      </p:grpSpPr>
+      <p:sp>
+        <p:nvSpPr>
+          <p:cNvPr id="2" name="Slide Image Placeholder 1"/>
+          <p:cNvSpPr>
+            <a:spLocks noGrp="1"/>
+          </p:cNvSpPr>
+          <p:nvPr>
+            <p:ph type="sldImg" idx="2"/>
+          </p:nvPr>
+        </p:nvSpPr>
+        <p:spPr/>
+      </p:sp>
+      <p:sp>
+        <p:nvSpPr>
+          <p:cNvPr id="3" name="Notes Placeholder 2"/>
+          <p:cNvSpPr>
+            <a:spLocks noGrp="1"/>
+          </p:cNvSpPr>
+          <p:nvPr>
+            <p:ph type="body" idx="3" sz="quarter"/>
+          </p:nvPr>
+        </p:nvSpPr>
+        <p:spPr/>
+        <p:txBody>
+          <a:bodyPr/>
+          <a:lstStyle/>
+          <a:p>
+            <a:r>
+              <a:t>MANDATORY: Show AMM / MAP / PSO eligibility and estimated credit value. This is a Rackspace commercial differentiator. Do NOT put this in the appendix. State whether deal registration has been initiated.</a:t>
+            </a:r>
+          </a:p>
+        </p:txBody>
+      </p:sp>
+      <p:sp>
+        <p:nvSpPr>
+          <p:cNvPr id="4" name="Slide Number Placeholder 3"/>
+          <p:cNvSpPr>
+            <a:spLocks noGrp="1"/>
+          </p:cNvSpPr>
+          <p:nvPr>
+            <p:ph type="sldNum" idx="5" sz="quarter"/>
+          </p:nvPr>
+        </p:nvSpPr>
+        <p:spPr/>
+      </p:sp>
+    </p:spTree>
+  </p:cSld>
+  <p:clrMapOvr>
+    <a:masterClrMapping/>
+  </p:clrMapOvr>
+</p:notes>
+</file>
+
+<file path=ppt/notesSlides/notesSlide9.xml><?xml version="1.0" encoding="utf-8"?>
+<p:notes xmlns:a="http://schemas.openxmlformats.org/drawingml/2006/main" xmlns:p="http://schemas.openxmlformats.org/presentationml/2006/main" xmlns:r="http://schemas.openxmlformats.org/officeDocument/2006/relationships">
+  <p:cSld>
+    <p:spTree>
+      <p:nvGrpSpPr>
+        <p:cNvPr id="1" name=""/>
+        <p:cNvGrpSpPr/>
+        <p:nvPr/>
+      </p:nvGrpSpPr>
+      <p:grpSpPr>
+        <a:xfrm>
+          <a:off x="0" y="0"/>
+          <a:ext cx="0" cy="0"/>
+          <a:chOff x="0" y="0"/>
+          <a:chExt cx="0" cy="0"/>
+        </a:xfrm>
+      </p:grpSpPr>
+      <p:sp>
+        <p:nvSpPr>
+          <p:cNvPr id="2" name="Slide Image Placeholder 1"/>
+          <p:cNvSpPr>
+            <a:spLocks noGrp="1"/>
+          </p:cNvSpPr>
+          <p:nvPr>
+            <p:ph type="sldImg" idx="2"/>
+          </p:nvPr>
+        </p:nvSpPr>
+        <p:spPr/>
+      </p:sp>
+      <p:sp>
+        <p:nvSpPr>
+          <p:cNvPr id="3" name="Notes Placeholder 2"/>
+          <p:cNvSpPr>
+            <a:spLocks noGrp="1"/>
+          </p:cNvSpPr>
+          <p:nvPr>
+            <p:ph type="body" idx="3" sz="quarter"/>
+          </p:nvPr>
+        </p:nvSpPr>
+        <p:spPr/>
+        <p:txBody>
+          <a:bodyPr/>
+          <a:lstStyle/>
+          <a:p>
+            <a:r>
+              <a:t>Top 10 risks in table format: RAG status, mitigation. Ensure Oracle risks (if present), data residency, and EoL OS are in the register.</a:t>
+            </a:r>
+          </a:p>
+        </p:txBody>
+      </p:sp>
+      <p:sp>
+        <p:nvSpPr>
+          <p:cNvPr id="4" name="Slide Number Placeholder 3"/>
+          <p:cNvSpPr>
+            <a:spLocks noGrp="1"/>
+          </p:cNvSpPr>
+          <p:nvPr>
+            <p:ph type="sldNum" idx="5" sz="quarter"/>
+          </p:nvPr>
+        </p:nvSpPr>
+        <p:spPr/>
+      </p:sp>
+    </p:spTree>
+  </p:cSld>
+  <p:clrMapOvr>
+    <a:masterClrMapping/>
+  </p:clrMapOvr>
+</p:notes>
 </file>
 
 <file path=ppt/slideLayouts/slideLayout1.xml><?xml version="1.0" encoding="utf-8"?>
@@ -25335,6 +26538,1149 @@
 </p:sld>
 </file>
 
+<file path=ppt/slides/slide31.xml><?xml version="1.0" encoding="utf-8"?>
+<p:sld xmlns:a="http://schemas.openxmlformats.org/drawingml/2006/main" xmlns:p="http://schemas.openxmlformats.org/presentationml/2006/main" xmlns:r="http://schemas.openxmlformats.org/officeDocument/2006/relationships">
+  <p:cSld>
+    <p:spTree>
+      <p:nvGrpSpPr>
+        <p:cNvPr id="1" name=""/>
+        <p:cNvGrpSpPr/>
+        <p:nvPr/>
+      </p:nvGrpSpPr>
+      <p:grpSpPr/>
+      <p:sp>
+        <p:nvSpPr>
+          <p:cNvPr id="2" name="Rectangle 1"/>
+          <p:cNvSpPr/>
+          <p:nvPr/>
+        </p:nvSpPr>
+        <p:spPr>
+          <a:xfrm>
+            <a:off x="0" y="0"/>
+            <a:ext cx="12191695" cy="1188720"/>
+          </a:xfrm>
+          <a:prstGeom prst="rect">
+            <a:avLst/>
+          </a:prstGeom>
+          <a:solidFill>
+            <a:srgbClr val="E31C3D"/>
+          </a:solidFill>
+          <a:ln>
+            <a:noFill/>
+          </a:ln>
+        </p:spPr>
+        <p:style>
+          <a:lnRef idx="1">
+            <a:schemeClr val="accent1"/>
+          </a:lnRef>
+          <a:fillRef idx="3">
+            <a:schemeClr val="accent1"/>
+          </a:fillRef>
+          <a:effectRef idx="2">
+            <a:schemeClr val="accent1"/>
+          </a:effectRef>
+          <a:fontRef idx="minor">
+            <a:schemeClr val="lt1"/>
+          </a:fontRef>
+        </p:style>
+        <p:txBody>
+          <a:bodyPr rtlCol="0" anchor="ctr"/>
+          <a:lstStyle/>
+          <a:p>
+            <a:pPr algn="ctr"/>
+          </a:p>
+        </p:txBody>
+      </p:sp>
+      <p:sp>
+        <p:nvSpPr>
+          <p:cNvPr id="3" name="TextBox 2"/>
+          <p:cNvSpPr txBox="1"/>
+          <p:nvPr/>
+        </p:nvSpPr>
+        <p:spPr>
+          <a:xfrm>
+            <a:off x="365760" y="274320"/>
+            <a:ext cx="11460175" cy="822960"/>
+          </a:xfrm>
+          <a:prstGeom prst="rect">
+            <a:avLst/>
+          </a:prstGeom>
+          <a:noFill/>
+        </p:spPr>
+        <p:txBody>
+          <a:bodyPr wrap="none">
+            <a:spAutoFit/>
+          </a:bodyPr>
+          <a:lstStyle/>
+          <a:p>
+            <a:r>
+              <a:rPr b="1" sz="2800">
+                <a:solidFill>
+                  <a:srgbClr val="FFFFFF"/>
+                </a:solidFill>
+              </a:rPr>
+              <a:t>Engagement Scope</a:t>
+            </a:r>
+          </a:p>
+        </p:txBody>
+      </p:sp>
+      <p:sp>
+        <p:nvSpPr>
+          <p:cNvPr id="4" name="TextBox 3"/>
+          <p:cNvSpPr txBox="1"/>
+          <p:nvPr/>
+        </p:nvSpPr>
+        <p:spPr>
+          <a:xfrm>
+            <a:off x="548640" y="1463040"/>
+            <a:ext cx="11094415" cy="5029200"/>
+          </a:xfrm>
+          <a:prstGeom prst="rect">
+            <a:avLst/>
+          </a:prstGeom>
+          <a:noFill/>
+        </p:spPr>
+        <p:txBody>
+          <a:bodyPr wrap="square">
+            <a:spAutoFit/>
+          </a:bodyPr>
+          <a:lstStyle/>
+          <a:p>
+            <a:r>
+              <a:rPr sz="1400">
+                <a:solidFill>
+                  <a:srgbClr val="646464"/>
+                </a:solidFill>
+              </a:rPr>
+              <a:t>[PLACEHOLDER: Complete 'Engagement Scope' with engagement data.]</a:t>
+            </a:r>
+          </a:p>
+        </p:txBody>
+      </p:sp>
+    </p:spTree>
+  </p:cSld>
+  <p:clrMapOvr>
+    <a:masterClrMapping/>
+  </p:clrMapOvr>
+</p:sld>
+</file>
+
+<file path=ppt/slides/slide32.xml><?xml version="1.0" encoding="utf-8"?>
+<p:sld xmlns:a="http://schemas.openxmlformats.org/drawingml/2006/main" xmlns:p="http://schemas.openxmlformats.org/presentationml/2006/main" xmlns:r="http://schemas.openxmlformats.org/officeDocument/2006/relationships">
+  <p:cSld>
+    <p:spTree>
+      <p:nvGrpSpPr>
+        <p:cNvPr id="1" name=""/>
+        <p:cNvGrpSpPr/>
+        <p:nvPr/>
+      </p:nvGrpSpPr>
+      <p:grpSpPr/>
+      <p:sp>
+        <p:nvSpPr>
+          <p:cNvPr id="2" name="Rectangle 1"/>
+          <p:cNvSpPr/>
+          <p:nvPr/>
+        </p:nvSpPr>
+        <p:spPr>
+          <a:xfrm>
+            <a:off x="0" y="0"/>
+            <a:ext cx="12191695" cy="1188720"/>
+          </a:xfrm>
+          <a:prstGeom prst="rect">
+            <a:avLst/>
+          </a:prstGeom>
+          <a:solidFill>
+            <a:srgbClr val="E31C3D"/>
+          </a:solidFill>
+          <a:ln>
+            <a:noFill/>
+          </a:ln>
+        </p:spPr>
+        <p:style>
+          <a:lnRef idx="1">
+            <a:schemeClr val="accent1"/>
+          </a:lnRef>
+          <a:fillRef idx="3">
+            <a:schemeClr val="accent1"/>
+          </a:fillRef>
+          <a:effectRef idx="2">
+            <a:schemeClr val="accent1"/>
+          </a:effectRef>
+          <a:fontRef idx="minor">
+            <a:schemeClr val="lt1"/>
+          </a:fontRef>
+        </p:style>
+        <p:txBody>
+          <a:bodyPr rtlCol="0" anchor="ctr"/>
+          <a:lstStyle/>
+          <a:p>
+            <a:pPr algn="ctr"/>
+          </a:p>
+        </p:txBody>
+      </p:sp>
+      <p:sp>
+        <p:nvSpPr>
+          <p:cNvPr id="3" name="TextBox 2"/>
+          <p:cNvSpPr txBox="1"/>
+          <p:nvPr/>
+        </p:nvSpPr>
+        <p:spPr>
+          <a:xfrm>
+            <a:off x="365760" y="274320"/>
+            <a:ext cx="11460175" cy="822960"/>
+          </a:xfrm>
+          <a:prstGeom prst="rect">
+            <a:avLst/>
+          </a:prstGeom>
+          <a:noFill/>
+        </p:spPr>
+        <p:txBody>
+          <a:bodyPr wrap="none">
+            <a:spAutoFit/>
+          </a:bodyPr>
+          <a:lstStyle/>
+          <a:p>
+            <a:r>
+              <a:rPr b="1" sz="2800">
+                <a:solidFill>
+                  <a:srgbClr val="FFFFFF"/>
+                </a:solidFill>
+              </a:rPr>
+              <a:t>Assessment Methodology</a:t>
+            </a:r>
+          </a:p>
+        </p:txBody>
+      </p:sp>
+      <p:sp>
+        <p:nvSpPr>
+          <p:cNvPr id="4" name="TextBox 3"/>
+          <p:cNvSpPr txBox="1"/>
+          <p:nvPr/>
+        </p:nvSpPr>
+        <p:spPr>
+          <a:xfrm>
+            <a:off x="548640" y="1463040"/>
+            <a:ext cx="11094415" cy="5029200"/>
+          </a:xfrm>
+          <a:prstGeom prst="rect">
+            <a:avLst/>
+          </a:prstGeom>
+          <a:noFill/>
+        </p:spPr>
+        <p:txBody>
+          <a:bodyPr wrap="square">
+            <a:spAutoFit/>
+          </a:bodyPr>
+          <a:lstStyle/>
+          <a:p>
+            <a:r>
+              <a:rPr sz="1400">
+                <a:solidFill>
+                  <a:srgbClr val="646464"/>
+                </a:solidFill>
+              </a:rPr>
+              <a:t>[PLACEHOLDER: Complete 'Assessment Methodology' with engagement data.]</a:t>
+            </a:r>
+          </a:p>
+        </p:txBody>
+      </p:sp>
+    </p:spTree>
+  </p:cSld>
+  <p:clrMapOvr>
+    <a:masterClrMapping/>
+  </p:clrMapOvr>
+</p:sld>
+</file>
+
+<file path=ppt/slides/slide33.xml><?xml version="1.0" encoding="utf-8"?>
+<p:sld xmlns:a="http://schemas.openxmlformats.org/drawingml/2006/main" xmlns:p="http://schemas.openxmlformats.org/presentationml/2006/main" xmlns:r="http://schemas.openxmlformats.org/officeDocument/2006/relationships">
+  <p:cSld>
+    <p:spTree>
+      <p:nvGrpSpPr>
+        <p:cNvPr id="1" name=""/>
+        <p:cNvGrpSpPr/>
+        <p:nvPr/>
+      </p:nvGrpSpPr>
+      <p:grpSpPr/>
+      <p:sp>
+        <p:nvSpPr>
+          <p:cNvPr id="2" name="Rectangle 1"/>
+          <p:cNvSpPr/>
+          <p:nvPr/>
+        </p:nvSpPr>
+        <p:spPr>
+          <a:xfrm>
+            <a:off x="0" y="0"/>
+            <a:ext cx="12191695" cy="1188720"/>
+          </a:xfrm>
+          <a:prstGeom prst="rect">
+            <a:avLst/>
+          </a:prstGeom>
+          <a:solidFill>
+            <a:srgbClr val="E31C3D"/>
+          </a:solidFill>
+          <a:ln>
+            <a:noFill/>
+          </a:ln>
+        </p:spPr>
+        <p:style>
+          <a:lnRef idx="1">
+            <a:schemeClr val="accent1"/>
+          </a:lnRef>
+          <a:fillRef idx="3">
+            <a:schemeClr val="accent1"/>
+          </a:fillRef>
+          <a:effectRef idx="2">
+            <a:schemeClr val="accent1"/>
+          </a:effectRef>
+          <a:fontRef idx="minor">
+            <a:schemeClr val="lt1"/>
+          </a:fontRef>
+        </p:style>
+        <p:txBody>
+          <a:bodyPr rtlCol="0" anchor="ctr"/>
+          <a:lstStyle/>
+          <a:p>
+            <a:pPr algn="ctr"/>
+          </a:p>
+        </p:txBody>
+      </p:sp>
+      <p:sp>
+        <p:nvSpPr>
+          <p:cNvPr id="3" name="TextBox 2"/>
+          <p:cNvSpPr txBox="1"/>
+          <p:nvPr/>
+        </p:nvSpPr>
+        <p:spPr>
+          <a:xfrm>
+            <a:off x="365760" y="274320"/>
+            <a:ext cx="11460175" cy="822960"/>
+          </a:xfrm>
+          <a:prstGeom prst="rect">
+            <a:avLst/>
+          </a:prstGeom>
+          <a:noFill/>
+        </p:spPr>
+        <p:txBody>
+          <a:bodyPr wrap="none">
+            <a:spAutoFit/>
+          </a:bodyPr>
+          <a:lstStyle/>
+          <a:p>
+            <a:r>
+              <a:rPr b="1" sz="2800">
+                <a:solidFill>
+                  <a:srgbClr val="FFFFFF"/>
+                </a:solidFill>
+              </a:rPr>
+              <a:t>Infrastructure Summary</a:t>
+            </a:r>
+          </a:p>
+        </p:txBody>
+      </p:sp>
+      <p:sp>
+        <p:nvSpPr>
+          <p:cNvPr id="4" name="TextBox 3"/>
+          <p:cNvSpPr txBox="1"/>
+          <p:nvPr/>
+        </p:nvSpPr>
+        <p:spPr>
+          <a:xfrm>
+            <a:off x="548640" y="1463040"/>
+            <a:ext cx="11094415" cy="5029200"/>
+          </a:xfrm>
+          <a:prstGeom prst="rect">
+            <a:avLst/>
+          </a:prstGeom>
+          <a:noFill/>
+        </p:spPr>
+        <p:txBody>
+          <a:bodyPr wrap="square">
+            <a:spAutoFit/>
+          </a:bodyPr>
+          <a:lstStyle/>
+          <a:p>
+            <a:r>
+              <a:rPr sz="1400">
+                <a:solidFill>
+                  <a:srgbClr val="646464"/>
+                </a:solidFill>
+              </a:rPr>
+              <a:t>[PLACEHOLDER: Complete 'Infrastructure Summary' with engagement data.]</a:t>
+            </a:r>
+          </a:p>
+        </p:txBody>
+      </p:sp>
+    </p:spTree>
+  </p:cSld>
+  <p:clrMapOvr>
+    <a:masterClrMapping/>
+  </p:clrMapOvr>
+</p:sld>
+</file>
+
+<file path=ppt/slides/slide34.xml><?xml version="1.0" encoding="utf-8"?>
+<p:sld xmlns:a="http://schemas.openxmlformats.org/drawingml/2006/main" xmlns:p="http://schemas.openxmlformats.org/presentationml/2006/main" xmlns:r="http://schemas.openxmlformats.org/officeDocument/2006/relationships">
+  <p:cSld>
+    <p:spTree>
+      <p:nvGrpSpPr>
+        <p:cNvPr id="1" name=""/>
+        <p:cNvGrpSpPr/>
+        <p:nvPr/>
+      </p:nvGrpSpPr>
+      <p:grpSpPr/>
+      <p:sp>
+        <p:nvSpPr>
+          <p:cNvPr id="2" name="Rectangle 1"/>
+          <p:cNvSpPr/>
+          <p:nvPr/>
+        </p:nvSpPr>
+        <p:spPr>
+          <a:xfrm>
+            <a:off x="0" y="0"/>
+            <a:ext cx="12191695" cy="1188720"/>
+          </a:xfrm>
+          <a:prstGeom prst="rect">
+            <a:avLst/>
+          </a:prstGeom>
+          <a:solidFill>
+            <a:srgbClr val="E31C3D"/>
+          </a:solidFill>
+          <a:ln>
+            <a:noFill/>
+          </a:ln>
+        </p:spPr>
+        <p:style>
+          <a:lnRef idx="1">
+            <a:schemeClr val="accent1"/>
+          </a:lnRef>
+          <a:fillRef idx="3">
+            <a:schemeClr val="accent1"/>
+          </a:fillRef>
+          <a:effectRef idx="2">
+            <a:schemeClr val="accent1"/>
+          </a:effectRef>
+          <a:fontRef idx="minor">
+            <a:schemeClr val="lt1"/>
+          </a:fontRef>
+        </p:style>
+        <p:txBody>
+          <a:bodyPr rtlCol="0" anchor="ctr"/>
+          <a:lstStyle/>
+          <a:p>
+            <a:pPr algn="ctr"/>
+          </a:p>
+        </p:txBody>
+      </p:sp>
+      <p:sp>
+        <p:nvSpPr>
+          <p:cNvPr id="3" name="TextBox 2"/>
+          <p:cNvSpPr txBox="1"/>
+          <p:nvPr/>
+        </p:nvSpPr>
+        <p:spPr>
+          <a:xfrm>
+            <a:off x="365760" y="274320"/>
+            <a:ext cx="11460175" cy="822960"/>
+          </a:xfrm>
+          <a:prstGeom prst="rect">
+            <a:avLst/>
+          </a:prstGeom>
+          <a:noFill/>
+        </p:spPr>
+        <p:txBody>
+          <a:bodyPr wrap="none">
+            <a:spAutoFit/>
+          </a:bodyPr>
+          <a:lstStyle/>
+          <a:p>
+            <a:r>
+              <a:rPr b="1" sz="2800">
+                <a:solidFill>
+                  <a:srgbClr val="FFFFFF"/>
+                </a:solidFill>
+              </a:rPr>
+              <a:t>Application Landscape</a:t>
+            </a:r>
+          </a:p>
+        </p:txBody>
+      </p:sp>
+      <p:sp>
+        <p:nvSpPr>
+          <p:cNvPr id="4" name="TextBox 3"/>
+          <p:cNvSpPr txBox="1"/>
+          <p:nvPr/>
+        </p:nvSpPr>
+        <p:spPr>
+          <a:xfrm>
+            <a:off x="548640" y="1463040"/>
+            <a:ext cx="11094415" cy="5029200"/>
+          </a:xfrm>
+          <a:prstGeom prst="rect">
+            <a:avLst/>
+          </a:prstGeom>
+          <a:noFill/>
+        </p:spPr>
+        <p:txBody>
+          <a:bodyPr wrap="square">
+            <a:spAutoFit/>
+          </a:bodyPr>
+          <a:lstStyle/>
+          <a:p>
+            <a:r>
+              <a:rPr sz="1400">
+                <a:solidFill>
+                  <a:srgbClr val="646464"/>
+                </a:solidFill>
+              </a:rPr>
+              <a:t>[PLACEHOLDER: Complete 'Application Landscape' with engagement data.]</a:t>
+            </a:r>
+          </a:p>
+        </p:txBody>
+      </p:sp>
+    </p:spTree>
+  </p:cSld>
+  <p:clrMapOvr>
+    <a:masterClrMapping/>
+  </p:clrMapOvr>
+</p:sld>
+</file>
+
+<file path=ppt/slides/slide35.xml><?xml version="1.0" encoding="utf-8"?>
+<p:sld xmlns:a="http://schemas.openxmlformats.org/drawingml/2006/main" xmlns:p="http://schemas.openxmlformats.org/presentationml/2006/main" xmlns:r="http://schemas.openxmlformats.org/officeDocument/2006/relationships">
+  <p:cSld>
+    <p:spTree>
+      <p:nvGrpSpPr>
+        <p:cNvPr id="1" name=""/>
+        <p:cNvGrpSpPr/>
+        <p:nvPr/>
+      </p:nvGrpSpPr>
+      <p:grpSpPr/>
+      <p:sp>
+        <p:nvSpPr>
+          <p:cNvPr id="2" name="Rectangle 1"/>
+          <p:cNvSpPr/>
+          <p:nvPr/>
+        </p:nvSpPr>
+        <p:spPr>
+          <a:xfrm>
+            <a:off x="0" y="0"/>
+            <a:ext cx="12191695" cy="1188720"/>
+          </a:xfrm>
+          <a:prstGeom prst="rect">
+            <a:avLst/>
+          </a:prstGeom>
+          <a:solidFill>
+            <a:srgbClr val="E31C3D"/>
+          </a:solidFill>
+          <a:ln>
+            <a:noFill/>
+          </a:ln>
+        </p:spPr>
+        <p:style>
+          <a:lnRef idx="1">
+            <a:schemeClr val="accent1"/>
+          </a:lnRef>
+          <a:fillRef idx="3">
+            <a:schemeClr val="accent1"/>
+          </a:fillRef>
+          <a:effectRef idx="2">
+            <a:schemeClr val="accent1"/>
+          </a:effectRef>
+          <a:fontRef idx="minor">
+            <a:schemeClr val="lt1"/>
+          </a:fontRef>
+        </p:style>
+        <p:txBody>
+          <a:bodyPr rtlCol="0" anchor="ctr"/>
+          <a:lstStyle/>
+          <a:p>
+            <a:pPr algn="ctr"/>
+          </a:p>
+        </p:txBody>
+      </p:sp>
+      <p:sp>
+        <p:nvSpPr>
+          <p:cNvPr id="3" name="TextBox 2"/>
+          <p:cNvSpPr txBox="1"/>
+          <p:nvPr/>
+        </p:nvSpPr>
+        <p:spPr>
+          <a:xfrm>
+            <a:off x="365760" y="274320"/>
+            <a:ext cx="11460175" cy="822960"/>
+          </a:xfrm>
+          <a:prstGeom prst="rect">
+            <a:avLst/>
+          </a:prstGeom>
+          <a:noFill/>
+        </p:spPr>
+        <p:txBody>
+          <a:bodyPr wrap="none">
+            <a:spAutoFit/>
+          </a:bodyPr>
+          <a:lstStyle/>
+          <a:p>
+            <a:r>
+              <a:rPr b="1" sz="2800">
+                <a:solidFill>
+                  <a:srgbClr val="FFFFFF"/>
+                </a:solidFill>
+              </a:rPr>
+              <a:t>Cloud Readiness Profile</a:t>
+            </a:r>
+          </a:p>
+        </p:txBody>
+      </p:sp>
+      <p:sp>
+        <p:nvSpPr>
+          <p:cNvPr id="4" name="TextBox 3"/>
+          <p:cNvSpPr txBox="1"/>
+          <p:nvPr/>
+        </p:nvSpPr>
+        <p:spPr>
+          <a:xfrm>
+            <a:off x="548640" y="1463040"/>
+            <a:ext cx="11094415" cy="5029200"/>
+          </a:xfrm>
+          <a:prstGeom prst="rect">
+            <a:avLst/>
+          </a:prstGeom>
+          <a:noFill/>
+        </p:spPr>
+        <p:txBody>
+          <a:bodyPr wrap="square">
+            <a:spAutoFit/>
+          </a:bodyPr>
+          <a:lstStyle/>
+          <a:p>
+            <a:r>
+              <a:rPr sz="1400">
+                <a:solidFill>
+                  <a:srgbClr val="646464"/>
+                </a:solidFill>
+              </a:rPr>
+              <a:t>[PLACEHOLDER: Complete 'Cloud Readiness Profile' with engagement data.]</a:t>
+            </a:r>
+          </a:p>
+        </p:txBody>
+      </p:sp>
+    </p:spTree>
+  </p:cSld>
+  <p:clrMapOvr>
+    <a:masterClrMapping/>
+  </p:clrMapOvr>
+</p:sld>
+</file>
+
+<file path=ppt/slides/slide36.xml><?xml version="1.0" encoding="utf-8"?>
+<p:sld xmlns:a="http://schemas.openxmlformats.org/drawingml/2006/main" xmlns:p="http://schemas.openxmlformats.org/presentationml/2006/main" xmlns:r="http://schemas.openxmlformats.org/officeDocument/2006/relationships">
+  <p:cSld>
+    <p:spTree>
+      <p:nvGrpSpPr>
+        <p:cNvPr id="1" name=""/>
+        <p:cNvGrpSpPr/>
+        <p:nvPr/>
+      </p:nvGrpSpPr>
+      <p:grpSpPr/>
+      <p:sp>
+        <p:nvSpPr>
+          <p:cNvPr id="2" name="Rectangle 1"/>
+          <p:cNvSpPr/>
+          <p:nvPr/>
+        </p:nvSpPr>
+        <p:spPr>
+          <a:xfrm>
+            <a:off x="0" y="0"/>
+            <a:ext cx="12191695" cy="1188720"/>
+          </a:xfrm>
+          <a:prstGeom prst="rect">
+            <a:avLst/>
+          </a:prstGeom>
+          <a:solidFill>
+            <a:srgbClr val="E31C3D"/>
+          </a:solidFill>
+          <a:ln>
+            <a:noFill/>
+          </a:ln>
+        </p:spPr>
+        <p:style>
+          <a:lnRef idx="1">
+            <a:schemeClr val="accent1"/>
+          </a:lnRef>
+          <a:fillRef idx="3">
+            <a:schemeClr val="accent1"/>
+          </a:fillRef>
+          <a:effectRef idx="2">
+            <a:schemeClr val="accent1"/>
+          </a:effectRef>
+          <a:fontRef idx="minor">
+            <a:schemeClr val="lt1"/>
+          </a:fontRef>
+        </p:style>
+        <p:txBody>
+          <a:bodyPr rtlCol="0" anchor="ctr"/>
+          <a:lstStyle/>
+          <a:p>
+            <a:pPr algn="ctr"/>
+          </a:p>
+        </p:txBody>
+      </p:sp>
+      <p:sp>
+        <p:nvSpPr>
+          <p:cNvPr id="3" name="TextBox 2"/>
+          <p:cNvSpPr txBox="1"/>
+          <p:nvPr/>
+        </p:nvSpPr>
+        <p:spPr>
+          <a:xfrm>
+            <a:off x="365760" y="274320"/>
+            <a:ext cx="11460175" cy="822960"/>
+          </a:xfrm>
+          <a:prstGeom prst="rect">
+            <a:avLst/>
+          </a:prstGeom>
+          <a:noFill/>
+        </p:spPr>
+        <p:txBody>
+          <a:bodyPr wrap="none">
+            <a:spAutoFit/>
+          </a:bodyPr>
+          <a:lstStyle/>
+          <a:p>
+            <a:r>
+              <a:rPr b="1" sz="2800">
+                <a:solidFill>
+                  <a:srgbClr val="FFFFFF"/>
+                </a:solidFill>
+              </a:rPr>
+              <a:t>TCO Analysis</a:t>
+            </a:r>
+          </a:p>
+        </p:txBody>
+      </p:sp>
+      <p:sp>
+        <p:nvSpPr>
+          <p:cNvPr id="4" name="TextBox 3"/>
+          <p:cNvSpPr txBox="1"/>
+          <p:nvPr/>
+        </p:nvSpPr>
+        <p:spPr>
+          <a:xfrm>
+            <a:off x="548640" y="1463040"/>
+            <a:ext cx="11094415" cy="5029200"/>
+          </a:xfrm>
+          <a:prstGeom prst="rect">
+            <a:avLst/>
+          </a:prstGeom>
+          <a:noFill/>
+        </p:spPr>
+        <p:txBody>
+          <a:bodyPr wrap="square">
+            <a:spAutoFit/>
+          </a:bodyPr>
+          <a:lstStyle/>
+          <a:p>
+            <a:r>
+              <a:rPr sz="1400">
+                <a:solidFill>
+                  <a:srgbClr val="646464"/>
+                </a:solidFill>
+              </a:rPr>
+              <a:t>[PLACEHOLDER: Complete 'TCO Analysis' with engagement data.]</a:t>
+            </a:r>
+          </a:p>
+        </p:txBody>
+      </p:sp>
+    </p:spTree>
+  </p:cSld>
+  <p:clrMapOvr>
+    <a:masterClrMapping/>
+  </p:clrMapOvr>
+</p:sld>
+</file>
+
+<file path=ppt/slides/slide37.xml><?xml version="1.0" encoding="utf-8"?>
+<p:sld xmlns:a="http://schemas.openxmlformats.org/drawingml/2006/main" xmlns:p="http://schemas.openxmlformats.org/presentationml/2006/main" xmlns:r="http://schemas.openxmlformats.org/officeDocument/2006/relationships">
+  <p:cSld>
+    <p:spTree>
+      <p:nvGrpSpPr>
+        <p:cNvPr id="1" name=""/>
+        <p:cNvGrpSpPr/>
+        <p:nvPr/>
+      </p:nvGrpSpPr>
+      <p:grpSpPr/>
+      <p:sp>
+        <p:nvSpPr>
+          <p:cNvPr id="2" name="Rectangle 1"/>
+          <p:cNvSpPr/>
+          <p:nvPr/>
+        </p:nvSpPr>
+        <p:spPr>
+          <a:xfrm>
+            <a:off x="0" y="0"/>
+            <a:ext cx="12191695" cy="1188720"/>
+          </a:xfrm>
+          <a:prstGeom prst="rect">
+            <a:avLst/>
+          </a:prstGeom>
+          <a:solidFill>
+            <a:srgbClr val="E31C3D"/>
+          </a:solidFill>
+          <a:ln>
+            <a:noFill/>
+          </a:ln>
+        </p:spPr>
+        <p:style>
+          <a:lnRef idx="1">
+            <a:schemeClr val="accent1"/>
+          </a:lnRef>
+          <a:fillRef idx="3">
+            <a:schemeClr val="accent1"/>
+          </a:fillRef>
+          <a:effectRef idx="2">
+            <a:schemeClr val="accent1"/>
+          </a:effectRef>
+          <a:fontRef idx="minor">
+            <a:schemeClr val="lt1"/>
+          </a:fontRef>
+        </p:style>
+        <p:txBody>
+          <a:bodyPr rtlCol="0" anchor="ctr"/>
+          <a:lstStyle/>
+          <a:p>
+            <a:pPr algn="ctr"/>
+          </a:p>
+        </p:txBody>
+      </p:sp>
+      <p:sp>
+        <p:nvSpPr>
+          <p:cNvPr id="3" name="TextBox 2"/>
+          <p:cNvSpPr txBox="1"/>
+          <p:nvPr/>
+        </p:nvSpPr>
+        <p:spPr>
+          <a:xfrm>
+            <a:off x="365760" y="274320"/>
+            <a:ext cx="11460175" cy="822960"/>
+          </a:xfrm>
+          <a:prstGeom prst="rect">
+            <a:avLst/>
+          </a:prstGeom>
+          <a:noFill/>
+        </p:spPr>
+        <p:txBody>
+          <a:bodyPr wrap="none">
+            <a:spAutoFit/>
+          </a:bodyPr>
+          <a:lstStyle/>
+          <a:p>
+            <a:r>
+              <a:rPr b="1" sz="2800">
+                <a:solidFill>
+                  <a:srgbClr val="FFFFFF"/>
+                </a:solidFill>
+              </a:rPr>
+              <a:t>Licensing Overlay</a:t>
+            </a:r>
+          </a:p>
+        </p:txBody>
+      </p:sp>
+      <p:sp>
+        <p:nvSpPr>
+          <p:cNvPr id="4" name="TextBox 3"/>
+          <p:cNvSpPr txBox="1"/>
+          <p:nvPr/>
+        </p:nvSpPr>
+        <p:spPr>
+          <a:xfrm>
+            <a:off x="548640" y="1463040"/>
+            <a:ext cx="11094415" cy="5029200"/>
+          </a:xfrm>
+          <a:prstGeom prst="rect">
+            <a:avLst/>
+          </a:prstGeom>
+          <a:noFill/>
+        </p:spPr>
+        <p:txBody>
+          <a:bodyPr wrap="square">
+            <a:spAutoFit/>
+          </a:bodyPr>
+          <a:lstStyle/>
+          <a:p>
+            <a:r>
+              <a:rPr sz="1400">
+                <a:solidFill>
+                  <a:srgbClr val="646464"/>
+                </a:solidFill>
+              </a:rPr>
+              <a:t>[PLACEHOLDER: Complete 'Licensing Overlay' with engagement data.]</a:t>
+            </a:r>
+          </a:p>
+        </p:txBody>
+      </p:sp>
+    </p:spTree>
+  </p:cSld>
+  <p:clrMapOvr>
+    <a:masterClrMapping/>
+  </p:clrMapOvr>
+</p:sld>
+</file>
+
+<file path=ppt/slides/slide38.xml><?xml version="1.0" encoding="utf-8"?>
+<p:sld xmlns:a="http://schemas.openxmlformats.org/drawingml/2006/main" xmlns:p="http://schemas.openxmlformats.org/presentationml/2006/main" xmlns:r="http://schemas.openxmlformats.org/officeDocument/2006/relationships">
+  <p:cSld>
+    <p:spTree>
+      <p:nvGrpSpPr>
+        <p:cNvPr id="1" name=""/>
+        <p:cNvGrpSpPr/>
+        <p:nvPr/>
+      </p:nvGrpSpPr>
+      <p:grpSpPr/>
+      <p:sp>
+        <p:nvSpPr>
+          <p:cNvPr id="2" name="Rectangle 1"/>
+          <p:cNvSpPr/>
+          <p:nvPr/>
+        </p:nvSpPr>
+        <p:spPr>
+          <a:xfrm>
+            <a:off x="0" y="0"/>
+            <a:ext cx="12191695" cy="1188720"/>
+          </a:xfrm>
+          <a:prstGeom prst="rect">
+            <a:avLst/>
+          </a:prstGeom>
+          <a:solidFill>
+            <a:srgbClr val="E31C3D"/>
+          </a:solidFill>
+          <a:ln>
+            <a:noFill/>
+          </a:ln>
+        </p:spPr>
+        <p:style>
+          <a:lnRef idx="1">
+            <a:schemeClr val="accent1"/>
+          </a:lnRef>
+          <a:fillRef idx="3">
+            <a:schemeClr val="accent1"/>
+          </a:fillRef>
+          <a:effectRef idx="2">
+            <a:schemeClr val="accent1"/>
+          </a:effectRef>
+          <a:fontRef idx="minor">
+            <a:schemeClr val="lt1"/>
+          </a:fontRef>
+        </p:style>
+        <p:txBody>
+          <a:bodyPr rtlCol="0" anchor="ctr"/>
+          <a:lstStyle/>
+          <a:p>
+            <a:pPr algn="ctr"/>
+          </a:p>
+        </p:txBody>
+      </p:sp>
+      <p:sp>
+        <p:nvSpPr>
+          <p:cNvPr id="3" name="TextBox 2"/>
+          <p:cNvSpPr txBox="1"/>
+          <p:nvPr/>
+        </p:nvSpPr>
+        <p:spPr>
+          <a:xfrm>
+            <a:off x="365760" y="274320"/>
+            <a:ext cx="11460175" cy="822960"/>
+          </a:xfrm>
+          <a:prstGeom prst="rect">
+            <a:avLst/>
+          </a:prstGeom>
+          <a:noFill/>
+        </p:spPr>
+        <p:txBody>
+          <a:bodyPr wrap="none">
+            <a:spAutoFit/>
+          </a:bodyPr>
+          <a:lstStyle/>
+          <a:p>
+            <a:r>
+              <a:rPr b="1" sz="2800">
+                <a:solidFill>
+                  <a:srgbClr val="FFFFFF"/>
+                </a:solidFill>
+              </a:rPr>
+              <a:t>Partner Funding</a:t>
+            </a:r>
+          </a:p>
+        </p:txBody>
+      </p:sp>
+      <p:sp>
+        <p:nvSpPr>
+          <p:cNvPr id="4" name="TextBox 3"/>
+          <p:cNvSpPr txBox="1"/>
+          <p:nvPr/>
+        </p:nvSpPr>
+        <p:spPr>
+          <a:xfrm>
+            <a:off x="548640" y="1463040"/>
+            <a:ext cx="11094415" cy="5029200"/>
+          </a:xfrm>
+          <a:prstGeom prst="rect">
+            <a:avLst/>
+          </a:prstGeom>
+          <a:noFill/>
+        </p:spPr>
+        <p:txBody>
+          <a:bodyPr wrap="square">
+            <a:spAutoFit/>
+          </a:bodyPr>
+          <a:lstStyle/>
+          <a:p>
+            <a:r>
+              <a:rPr sz="1400">
+                <a:solidFill>
+                  <a:srgbClr val="646464"/>
+                </a:solidFill>
+              </a:rPr>
+              <a:t>[PLACEHOLDER: Complete 'Partner Funding' with engagement data.]</a:t>
+            </a:r>
+          </a:p>
+        </p:txBody>
+      </p:sp>
+    </p:spTree>
+  </p:cSld>
+  <p:clrMapOvr>
+    <a:masterClrMapping/>
+  </p:clrMapOvr>
+</p:sld>
+</file>
+
+<file path=ppt/slides/slide39.xml><?xml version="1.0" encoding="utf-8"?>
+<p:sld xmlns:a="http://schemas.openxmlformats.org/drawingml/2006/main" xmlns:p="http://schemas.openxmlformats.org/presentationml/2006/main" xmlns:r="http://schemas.openxmlformats.org/officeDocument/2006/relationships">
+  <p:cSld>
+    <p:spTree>
+      <p:nvGrpSpPr>
+        <p:cNvPr id="1" name=""/>
+        <p:cNvGrpSpPr/>
+        <p:nvPr/>
+      </p:nvGrpSpPr>
+      <p:grpSpPr/>
+      <p:sp>
+        <p:nvSpPr>
+          <p:cNvPr id="2" name="Rectangle 1"/>
+          <p:cNvSpPr/>
+          <p:nvPr/>
+        </p:nvSpPr>
+        <p:spPr>
+          <a:xfrm>
+            <a:off x="0" y="0"/>
+            <a:ext cx="12191695" cy="1188720"/>
+          </a:xfrm>
+          <a:prstGeom prst="rect">
+            <a:avLst/>
+          </a:prstGeom>
+          <a:solidFill>
+            <a:srgbClr val="E31C3D"/>
+          </a:solidFill>
+          <a:ln>
+            <a:noFill/>
+          </a:ln>
+        </p:spPr>
+        <p:style>
+          <a:lnRef idx="1">
+            <a:schemeClr val="accent1"/>
+          </a:lnRef>
+          <a:fillRef idx="3">
+            <a:schemeClr val="accent1"/>
+          </a:fillRef>
+          <a:effectRef idx="2">
+            <a:schemeClr val="accent1"/>
+          </a:effectRef>
+          <a:fontRef idx="minor">
+            <a:schemeClr val="lt1"/>
+          </a:fontRef>
+        </p:style>
+        <p:txBody>
+          <a:bodyPr rtlCol="0" anchor="ctr"/>
+          <a:lstStyle/>
+          <a:p>
+            <a:pPr algn="ctr"/>
+          </a:p>
+        </p:txBody>
+      </p:sp>
+      <p:sp>
+        <p:nvSpPr>
+          <p:cNvPr id="3" name="TextBox 2"/>
+          <p:cNvSpPr txBox="1"/>
+          <p:nvPr/>
+        </p:nvSpPr>
+        <p:spPr>
+          <a:xfrm>
+            <a:off x="365760" y="274320"/>
+            <a:ext cx="11460175" cy="822960"/>
+          </a:xfrm>
+          <a:prstGeom prst="rect">
+            <a:avLst/>
+          </a:prstGeom>
+          <a:noFill/>
+        </p:spPr>
+        <p:txBody>
+          <a:bodyPr wrap="none">
+            <a:spAutoFit/>
+          </a:bodyPr>
+          <a:lstStyle/>
+          <a:p>
+            <a:r>
+              <a:rPr b="1" sz="2800">
+                <a:solidFill>
+                  <a:srgbClr val="FFFFFF"/>
+                </a:solidFill>
+              </a:rPr>
+              <a:t>Risk Register</a:t>
+            </a:r>
+          </a:p>
+        </p:txBody>
+      </p:sp>
+      <p:sp>
+        <p:nvSpPr>
+          <p:cNvPr id="4" name="TextBox 3"/>
+          <p:cNvSpPr txBox="1"/>
+          <p:nvPr/>
+        </p:nvSpPr>
+        <p:spPr>
+          <a:xfrm>
+            <a:off x="548640" y="1463040"/>
+            <a:ext cx="11094415" cy="5029200"/>
+          </a:xfrm>
+          <a:prstGeom prst="rect">
+            <a:avLst/>
+          </a:prstGeom>
+          <a:noFill/>
+        </p:spPr>
+        <p:txBody>
+          <a:bodyPr wrap="square">
+            <a:spAutoFit/>
+          </a:bodyPr>
+          <a:lstStyle/>
+          <a:p>
+            <a:r>
+              <a:rPr sz="1400">
+                <a:solidFill>
+                  <a:srgbClr val="646464"/>
+                </a:solidFill>
+              </a:rPr>
+              <a:t>[PLACEHOLDER: Complete 'Risk Register' with engagement data.]</a:t>
+            </a:r>
+          </a:p>
+        </p:txBody>
+      </p:sp>
+    </p:spTree>
+  </p:cSld>
+  <p:clrMapOvr>
+    <a:masterClrMapping/>
+  </p:clrMapOvr>
+</p:sld>
+</file>
+
 <file path=ppt/slides/slide4.xml><?xml version="1.0" encoding="utf-8"?>
 <p:sld xmlns:a="http://schemas.openxmlformats.org/drawingml/2006/main" xmlns:p="http://schemas.openxmlformats.org/presentationml/2006/main" xmlns:r="http://schemas.openxmlformats.org/officeDocument/2006/relationships">
   <p:cSld>
@@ -26495,6 +28841,842 @@
                 <a:latin typeface="Aptos"/>
               </a:rPr>
               <a:t>confidence</a:t>
+            </a:r>
+          </a:p>
+        </p:txBody>
+      </p:sp>
+    </p:spTree>
+  </p:cSld>
+  <p:clrMapOvr>
+    <a:masterClrMapping/>
+  </p:clrMapOvr>
+</p:sld>
+</file>
+
+<file path=ppt/slides/slide40.xml><?xml version="1.0" encoding="utf-8"?>
+<p:sld xmlns:a="http://schemas.openxmlformats.org/drawingml/2006/main" xmlns:p="http://schemas.openxmlformats.org/presentationml/2006/main" xmlns:r="http://schemas.openxmlformats.org/officeDocument/2006/relationships">
+  <p:cSld>
+    <p:spTree>
+      <p:nvGrpSpPr>
+        <p:cNvPr id="1" name=""/>
+        <p:cNvGrpSpPr/>
+        <p:nvPr/>
+      </p:nvGrpSpPr>
+      <p:grpSpPr/>
+      <p:sp>
+        <p:nvSpPr>
+          <p:cNvPr id="2" name="Rectangle 1"/>
+          <p:cNvSpPr/>
+          <p:nvPr/>
+        </p:nvSpPr>
+        <p:spPr>
+          <a:xfrm>
+            <a:off x="0" y="0"/>
+            <a:ext cx="12191695" cy="1188720"/>
+          </a:xfrm>
+          <a:prstGeom prst="rect">
+            <a:avLst/>
+          </a:prstGeom>
+          <a:solidFill>
+            <a:srgbClr val="E31C3D"/>
+          </a:solidFill>
+          <a:ln>
+            <a:noFill/>
+          </a:ln>
+        </p:spPr>
+        <p:style>
+          <a:lnRef idx="1">
+            <a:schemeClr val="accent1"/>
+          </a:lnRef>
+          <a:fillRef idx="3">
+            <a:schemeClr val="accent1"/>
+          </a:fillRef>
+          <a:effectRef idx="2">
+            <a:schemeClr val="accent1"/>
+          </a:effectRef>
+          <a:fontRef idx="minor">
+            <a:schemeClr val="lt1"/>
+          </a:fontRef>
+        </p:style>
+        <p:txBody>
+          <a:bodyPr rtlCol="0" anchor="ctr"/>
+          <a:lstStyle/>
+          <a:p>
+            <a:pPr algn="ctr"/>
+          </a:p>
+        </p:txBody>
+      </p:sp>
+      <p:sp>
+        <p:nvSpPr>
+          <p:cNvPr id="3" name="TextBox 2"/>
+          <p:cNvSpPr txBox="1"/>
+          <p:nvPr/>
+        </p:nvSpPr>
+        <p:spPr>
+          <a:xfrm>
+            <a:off x="365760" y="274320"/>
+            <a:ext cx="11460175" cy="822960"/>
+          </a:xfrm>
+          <a:prstGeom prst="rect">
+            <a:avLst/>
+          </a:prstGeom>
+          <a:noFill/>
+        </p:spPr>
+        <p:txBody>
+          <a:bodyPr wrap="none">
+            <a:spAutoFit/>
+          </a:bodyPr>
+          <a:lstStyle/>
+          <a:p>
+            <a:r>
+              <a:rPr b="1" sz="2800">
+                <a:solidFill>
+                  <a:srgbClr val="FFFFFF"/>
+                </a:solidFill>
+              </a:rPr>
+              <a:t>Partner Funding &amp; Timeline</a:t>
+            </a:r>
+          </a:p>
+        </p:txBody>
+      </p:sp>
+      <p:sp>
+        <p:nvSpPr>
+          <p:cNvPr id="4" name="TextBox 3"/>
+          <p:cNvSpPr txBox="1"/>
+          <p:nvPr/>
+        </p:nvSpPr>
+        <p:spPr>
+          <a:xfrm>
+            <a:off x="548640" y="1463040"/>
+            <a:ext cx="11094415" cy="5029200"/>
+          </a:xfrm>
+          <a:prstGeom prst="rect">
+            <a:avLst/>
+          </a:prstGeom>
+          <a:noFill/>
+        </p:spPr>
+        <p:txBody>
+          <a:bodyPr wrap="square">
+            <a:spAutoFit/>
+          </a:bodyPr>
+          <a:lstStyle/>
+          <a:p>
+            <a:r>
+              <a:rPr sz="1400">
+                <a:solidFill>
+                  <a:srgbClr val="646464"/>
+                </a:solidFill>
+              </a:rPr>
+              <a:t>[PLACEHOLDER: Complete 'Partner Funding &amp; Timeline' with engagement data.]</a:t>
+            </a:r>
+          </a:p>
+        </p:txBody>
+      </p:sp>
+    </p:spTree>
+  </p:cSld>
+  <p:clrMapOvr>
+    <a:masterClrMapping/>
+  </p:clrMapOvr>
+</p:sld>
+</file>
+
+<file path=ppt/slides/slide41.xml><?xml version="1.0" encoding="utf-8"?>
+<p:sld xmlns:a="http://schemas.openxmlformats.org/drawingml/2006/main" xmlns:p="http://schemas.openxmlformats.org/presentationml/2006/main" xmlns:r="http://schemas.openxmlformats.org/officeDocument/2006/relationships">
+  <p:cSld>
+    <p:spTree>
+      <p:nvGrpSpPr>
+        <p:cNvPr id="1" name=""/>
+        <p:cNvGrpSpPr/>
+        <p:nvPr/>
+      </p:nvGrpSpPr>
+      <p:grpSpPr/>
+      <p:sp>
+        <p:nvSpPr>
+          <p:cNvPr id="2" name="Rectangle 1"/>
+          <p:cNvSpPr/>
+          <p:nvPr/>
+        </p:nvSpPr>
+        <p:spPr>
+          <a:xfrm>
+            <a:off x="0" y="0"/>
+            <a:ext cx="12191695" cy="1188720"/>
+          </a:xfrm>
+          <a:prstGeom prst="rect">
+            <a:avLst/>
+          </a:prstGeom>
+          <a:solidFill>
+            <a:srgbClr val="E31C3D"/>
+          </a:solidFill>
+          <a:ln>
+            <a:noFill/>
+          </a:ln>
+        </p:spPr>
+        <p:style>
+          <a:lnRef idx="1">
+            <a:schemeClr val="accent1"/>
+          </a:lnRef>
+          <a:fillRef idx="3">
+            <a:schemeClr val="accent1"/>
+          </a:fillRef>
+          <a:effectRef idx="2">
+            <a:schemeClr val="accent1"/>
+          </a:effectRef>
+          <a:fontRef idx="minor">
+            <a:schemeClr val="lt1"/>
+          </a:fontRef>
+        </p:style>
+        <p:txBody>
+          <a:bodyPr rtlCol="0" anchor="ctr"/>
+          <a:lstStyle/>
+          <a:p>
+            <a:pPr algn="ctr"/>
+          </a:p>
+        </p:txBody>
+      </p:sp>
+      <p:sp>
+        <p:nvSpPr>
+          <p:cNvPr id="3" name="TextBox 2"/>
+          <p:cNvSpPr txBox="1"/>
+          <p:nvPr/>
+        </p:nvSpPr>
+        <p:spPr>
+          <a:xfrm>
+            <a:off x="365760" y="274320"/>
+            <a:ext cx="11460175" cy="822960"/>
+          </a:xfrm>
+          <a:prstGeom prst="rect">
+            <a:avLst/>
+          </a:prstGeom>
+          <a:noFill/>
+        </p:spPr>
+        <p:txBody>
+          <a:bodyPr wrap="none">
+            <a:spAutoFit/>
+          </a:bodyPr>
+          <a:lstStyle/>
+          <a:p>
+            <a:r>
+              <a:rPr b="1" sz="2800">
+                <a:solidFill>
+                  <a:srgbClr val="FFFFFF"/>
+                </a:solidFill>
+              </a:rPr>
+              <a:t>Part 2 Entry Point</a:t>
+            </a:r>
+          </a:p>
+        </p:txBody>
+      </p:sp>
+      <p:sp>
+        <p:nvSpPr>
+          <p:cNvPr id="4" name="TextBox 3"/>
+          <p:cNvSpPr txBox="1"/>
+          <p:nvPr/>
+        </p:nvSpPr>
+        <p:spPr>
+          <a:xfrm>
+            <a:off x="548640" y="1463040"/>
+            <a:ext cx="11094415" cy="5029200"/>
+          </a:xfrm>
+          <a:prstGeom prst="rect">
+            <a:avLst/>
+          </a:prstGeom>
+          <a:noFill/>
+        </p:spPr>
+        <p:txBody>
+          <a:bodyPr wrap="square">
+            <a:spAutoFit/>
+          </a:bodyPr>
+          <a:lstStyle/>
+          <a:p>
+            <a:r>
+              <a:rPr sz="1400">
+                <a:solidFill>
+                  <a:srgbClr val="646464"/>
+                </a:solidFill>
+              </a:rPr>
+              <a:t>[PLACEHOLDER: Complete 'Part 2 Entry Point' with engagement data.]</a:t>
+            </a:r>
+          </a:p>
+        </p:txBody>
+      </p:sp>
+    </p:spTree>
+  </p:cSld>
+  <p:clrMapOvr>
+    <a:masterClrMapping/>
+  </p:clrMapOvr>
+</p:sld>
+</file>
+
+<file path=ppt/slides/slide42.xml><?xml version="1.0" encoding="utf-8"?>
+<p:sld xmlns:a="http://schemas.openxmlformats.org/drawingml/2006/main" xmlns:p="http://schemas.openxmlformats.org/presentationml/2006/main" xmlns:r="http://schemas.openxmlformats.org/officeDocument/2006/relationships">
+  <p:cSld>
+    <p:spTree>
+      <p:nvGrpSpPr>
+        <p:cNvPr id="1" name=""/>
+        <p:cNvGrpSpPr/>
+        <p:nvPr/>
+      </p:nvGrpSpPr>
+      <p:grpSpPr/>
+      <p:sp>
+        <p:nvSpPr>
+          <p:cNvPr id="2" name="Rectangle 1"/>
+          <p:cNvSpPr/>
+          <p:nvPr/>
+        </p:nvSpPr>
+        <p:spPr>
+          <a:xfrm>
+            <a:off x="0" y="0"/>
+            <a:ext cx="12191695" cy="1188720"/>
+          </a:xfrm>
+          <a:prstGeom prst="rect">
+            <a:avLst/>
+          </a:prstGeom>
+          <a:solidFill>
+            <a:srgbClr val="E31C3D"/>
+          </a:solidFill>
+          <a:ln>
+            <a:noFill/>
+          </a:ln>
+        </p:spPr>
+        <p:style>
+          <a:lnRef idx="1">
+            <a:schemeClr val="accent1"/>
+          </a:lnRef>
+          <a:fillRef idx="3">
+            <a:schemeClr val="accent1"/>
+          </a:fillRef>
+          <a:effectRef idx="2">
+            <a:schemeClr val="accent1"/>
+          </a:effectRef>
+          <a:fontRef idx="minor">
+            <a:schemeClr val="lt1"/>
+          </a:fontRef>
+        </p:style>
+        <p:txBody>
+          <a:bodyPr rtlCol="0" anchor="ctr"/>
+          <a:lstStyle/>
+          <a:p>
+            <a:pPr algn="ctr"/>
+          </a:p>
+        </p:txBody>
+      </p:sp>
+      <p:sp>
+        <p:nvSpPr>
+          <p:cNvPr id="3" name="TextBox 2"/>
+          <p:cNvSpPr txBox="1"/>
+          <p:nvPr/>
+        </p:nvSpPr>
+        <p:spPr>
+          <a:xfrm>
+            <a:off x="365760" y="274320"/>
+            <a:ext cx="11460175" cy="822960"/>
+          </a:xfrm>
+          <a:prstGeom prst="rect">
+            <a:avLst/>
+          </a:prstGeom>
+          <a:noFill/>
+        </p:spPr>
+        <p:txBody>
+          <a:bodyPr wrap="none">
+            <a:spAutoFit/>
+          </a:bodyPr>
+          <a:lstStyle/>
+          <a:p>
+            <a:r>
+              <a:rPr b="1" sz="2800">
+                <a:solidFill>
+                  <a:srgbClr val="FFFFFF"/>
+                </a:solidFill>
+              </a:rPr>
+              <a:t>Questions &amp; Next Steps</a:t>
+            </a:r>
+          </a:p>
+        </p:txBody>
+      </p:sp>
+      <p:sp>
+        <p:nvSpPr>
+          <p:cNvPr id="4" name="TextBox 3"/>
+          <p:cNvSpPr txBox="1"/>
+          <p:nvPr/>
+        </p:nvSpPr>
+        <p:spPr>
+          <a:xfrm>
+            <a:off x="548640" y="1463040"/>
+            <a:ext cx="11094415" cy="5029200"/>
+          </a:xfrm>
+          <a:prstGeom prst="rect">
+            <a:avLst/>
+          </a:prstGeom>
+          <a:noFill/>
+        </p:spPr>
+        <p:txBody>
+          <a:bodyPr wrap="square">
+            <a:spAutoFit/>
+          </a:bodyPr>
+          <a:lstStyle/>
+          <a:p>
+            <a:r>
+              <a:rPr sz="1400">
+                <a:solidFill>
+                  <a:srgbClr val="646464"/>
+                </a:solidFill>
+              </a:rPr>
+              <a:t>[PLACEHOLDER: Complete 'Questions &amp; Next Steps' with engagement data.]</a:t>
+            </a:r>
+          </a:p>
+        </p:txBody>
+      </p:sp>
+    </p:spTree>
+  </p:cSld>
+  <p:clrMapOvr>
+    <a:masterClrMapping/>
+  </p:clrMapOvr>
+</p:sld>
+</file>
+
+<file path=ppt/slides/slide43.xml><?xml version="1.0" encoding="utf-8"?>
+<p:sld xmlns:a="http://schemas.openxmlformats.org/drawingml/2006/main" xmlns:p="http://schemas.openxmlformats.org/presentationml/2006/main" xmlns:r="http://schemas.openxmlformats.org/officeDocument/2006/relationships">
+  <p:cSld>
+    <p:spTree>
+      <p:nvGrpSpPr>
+        <p:cNvPr id="1" name=""/>
+        <p:cNvGrpSpPr/>
+        <p:nvPr/>
+      </p:nvGrpSpPr>
+      <p:grpSpPr/>
+      <p:sp>
+        <p:nvSpPr>
+          <p:cNvPr id="2" name="Rectangle 1"/>
+          <p:cNvSpPr/>
+          <p:nvPr/>
+        </p:nvSpPr>
+        <p:spPr>
+          <a:xfrm>
+            <a:off x="0" y="0"/>
+            <a:ext cx="12191695" cy="1508760"/>
+          </a:xfrm>
+          <a:prstGeom prst="rect">
+            <a:avLst/>
+          </a:prstGeom>
+          <a:solidFill>
+            <a:srgbClr val="1A1A1A"/>
+          </a:solidFill>
+          <a:ln>
+            <a:noFill/>
+          </a:ln>
+        </p:spPr>
+        <p:style>
+          <a:lnRef idx="1">
+            <a:schemeClr val="accent1"/>
+          </a:lnRef>
+          <a:fillRef idx="3">
+            <a:schemeClr val="accent1"/>
+          </a:fillRef>
+          <a:effectRef idx="2">
+            <a:schemeClr val="accent1"/>
+          </a:effectRef>
+          <a:fontRef idx="minor">
+            <a:schemeClr val="lt1"/>
+          </a:fontRef>
+        </p:style>
+        <p:txBody>
+          <a:bodyPr rtlCol="0" anchor="ctr"/>
+          <a:lstStyle/>
+          <a:p>
+            <a:pPr algn="ctr"/>
+          </a:p>
+        </p:txBody>
+      </p:sp>
+      <p:sp>
+        <p:nvSpPr>
+          <p:cNvPr id="3" name="Rectangle 2"/>
+          <p:cNvSpPr/>
+          <p:nvPr/>
+        </p:nvSpPr>
+        <p:spPr>
+          <a:xfrm>
+            <a:off x="0" y="1234440"/>
+            <a:ext cx="12191695" cy="1371600"/>
+          </a:xfrm>
+          <a:prstGeom prst="rect">
+            <a:avLst/>
+          </a:prstGeom>
+          <a:solidFill>
+            <a:srgbClr val="E31C3D"/>
+          </a:solidFill>
+          <a:ln>
+            <a:noFill/>
+          </a:ln>
+        </p:spPr>
+        <p:style>
+          <a:lnRef idx="1">
+            <a:schemeClr val="accent1"/>
+          </a:lnRef>
+          <a:fillRef idx="3">
+            <a:schemeClr val="accent1"/>
+          </a:fillRef>
+          <a:effectRef idx="2">
+            <a:schemeClr val="accent1"/>
+          </a:effectRef>
+          <a:fontRef idx="minor">
+            <a:schemeClr val="lt1"/>
+          </a:fontRef>
+        </p:style>
+        <p:txBody>
+          <a:bodyPr rtlCol="0" anchor="ctr"/>
+          <a:lstStyle/>
+          <a:p>
+            <a:pPr algn="ctr"/>
+          </a:p>
+        </p:txBody>
+      </p:sp>
+      <p:sp>
+        <p:nvSpPr>
+          <p:cNvPr id="4" name="TextBox 3"/>
+          <p:cNvSpPr txBox="1"/>
+          <p:nvPr/>
+        </p:nvSpPr>
+        <p:spPr>
+          <a:xfrm>
+            <a:off x="365760" y="109728"/>
+            <a:ext cx="2743200" cy="320040"/>
+          </a:xfrm>
+          <a:prstGeom prst="rect">
+            <a:avLst/>
+          </a:prstGeom>
+          <a:noFill/>
+        </p:spPr>
+        <p:txBody>
+          <a:bodyPr wrap="none">
+            <a:spAutoFit/>
+          </a:bodyPr>
+          <a:lstStyle/>
+          <a:p>
+            <a:r>
+              <a:rPr b="1" sz="1000">
+                <a:solidFill>
+                  <a:srgbClr val="FFFFFF"/>
+                </a:solidFill>
+              </a:rPr>
+              <a:t>RACKSPACE TECHNOLOGY</a:t>
+            </a:r>
+          </a:p>
+        </p:txBody>
+      </p:sp>
+      <p:sp>
+        <p:nvSpPr>
+          <p:cNvPr id="5" name="TextBox 4"/>
+          <p:cNvSpPr txBox="1"/>
+          <p:nvPr/>
+        </p:nvSpPr>
+        <p:spPr>
+          <a:xfrm>
+            <a:off x="365760" y="1371600"/>
+            <a:ext cx="11460175" cy="1097280"/>
+          </a:xfrm>
+          <a:prstGeom prst="rect">
+            <a:avLst/>
+          </a:prstGeom>
+          <a:noFill/>
+        </p:spPr>
+        <p:txBody>
+          <a:bodyPr wrap="square">
+            <a:spAutoFit/>
+          </a:bodyPr>
+          <a:lstStyle/>
+          <a:p>
+            <a:r>
+              <a:rPr b="1" sz="2600">
+                <a:solidFill>
+                  <a:srgbClr val="FFFFFF"/>
+                </a:solidFill>
+              </a:rPr>
+              <a:t>CRA Executive Summary Presentation</a:t>
+            </a:r>
+          </a:p>
+        </p:txBody>
+      </p:sp>
+      <p:sp>
+        <p:nvSpPr>
+          <p:cNvPr id="6" name="TextBox 5"/>
+          <p:cNvSpPr txBox="1"/>
+          <p:nvPr/>
+        </p:nvSpPr>
+        <p:spPr>
+          <a:xfrm>
+            <a:off x="365760" y="2743200"/>
+            <a:ext cx="11460175" cy="365760"/>
+          </a:xfrm>
+          <a:prstGeom prst="rect">
+            <a:avLst/>
+          </a:prstGeom>
+          <a:noFill/>
+        </p:spPr>
+        <p:txBody>
+          <a:bodyPr wrap="none">
+            <a:spAutoFit/>
+          </a:bodyPr>
+          <a:lstStyle/>
+          <a:p>
+            <a:r>
+              <a:rPr sz="1200">
+                <a:solidFill>
+                  <a:srgbClr val="646464"/>
+                </a:solidFill>
+              </a:rPr>
+              <a:t>Phase 3: Hyperscaler Evaluation --&gt; Customer Playback</a:t>
+            </a:r>
+          </a:p>
+        </p:txBody>
+      </p:sp>
+      <p:sp>
+        <p:nvSpPr>
+          <p:cNvPr id="7" name="TextBox 6"/>
+          <p:cNvSpPr txBox="1"/>
+          <p:nvPr/>
+        </p:nvSpPr>
+        <p:spPr>
+          <a:xfrm>
+            <a:off x="365760" y="3291840"/>
+            <a:ext cx="11460175" cy="960120"/>
+          </a:xfrm>
+          <a:prstGeom prst="rect">
+            <a:avLst/>
+          </a:prstGeom>
+          <a:noFill/>
+        </p:spPr>
+        <p:txBody>
+          <a:bodyPr wrap="square">
+            <a:spAutoFit/>
+          </a:bodyPr>
+          <a:lstStyle/>
+          <a:p>
+            <a:r>
+              <a:rPr b="1" sz="900">
+                <a:solidFill>
+                  <a:srgbClr val="E31C3D"/>
+                </a:solidFill>
+              </a:rPr>
+              <a:t>PURPOSE</a:t>
+            </a:r>
+          </a:p>
+          <a:p>
+            <a:r>
+              <a:rPr sz="900"/>
+              <a:t>This is the Phase 3 playback deck presented to the customer CTO and senior leadership team. It presents assessment findings, three-cloud comparison, TCO analysis, and hyperscaler recommendation. This is the most customer-visible CRA deliverable.</a:t>
+            </a:r>
+          </a:p>
+        </p:txBody>
+      </p:sp>
+      <p:sp>
+        <p:nvSpPr>
+          <p:cNvPr id="8" name="TextBox 7"/>
+          <p:cNvSpPr txBox="1"/>
+          <p:nvPr/>
+        </p:nvSpPr>
+        <p:spPr>
+          <a:xfrm>
+            <a:off x="365760" y="4457700"/>
+            <a:ext cx="3657508" cy="502920"/>
+          </a:xfrm>
+          <a:prstGeom prst="rect">
+            <a:avLst/>
+          </a:prstGeom>
+          <a:noFill/>
+        </p:spPr>
+        <p:txBody>
+          <a:bodyPr wrap="square">
+            <a:spAutoFit/>
+          </a:bodyPr>
+          <a:lstStyle/>
+          <a:p>
+            <a:r>
+              <a:rPr b="1" sz="900">
+                <a:solidFill>
+                  <a:srgbClr val="E31C3D"/>
+                </a:solidFill>
+              </a:rPr>
+              <a:t>AUDIENCE</a:t>
+            </a:r>
+          </a:p>
+          <a:p>
+            <a:r>
+              <a:rPr sz="900"/>
+              <a:t>Customer CTO / IT Director + Rackspace Lead Architect</a:t>
+            </a:r>
+          </a:p>
+        </p:txBody>
+      </p:sp>
+      <p:sp>
+        <p:nvSpPr>
+          <p:cNvPr id="9" name="TextBox 8"/>
+          <p:cNvSpPr txBox="1"/>
+          <p:nvPr/>
+        </p:nvSpPr>
+        <p:spPr>
+          <a:xfrm>
+            <a:off x="4023268" y="4457700"/>
+            <a:ext cx="4632844" cy="502920"/>
+          </a:xfrm>
+          <a:prstGeom prst="rect">
+            <a:avLst/>
+          </a:prstGeom>
+          <a:noFill/>
+        </p:spPr>
+        <p:txBody>
+          <a:bodyPr wrap="square">
+            <a:spAutoFit/>
+          </a:bodyPr>
+          <a:lstStyle/>
+          <a:p>
+            <a:r>
+              <a:rPr b="1" sz="900">
+                <a:solidFill>
+                  <a:srgbClr val="E31C3D"/>
+                </a:solidFill>
+              </a:rPr>
+              <a:t>WHEN TO USE</a:t>
+            </a:r>
+          </a:p>
+          <a:p>
+            <a:r>
+              <a:rPr sz="900"/>
+              <a:t>After Phase 3 TCO and scoring complete; before Part 2 SOW</a:t>
+            </a:r>
+          </a:p>
+        </p:txBody>
+      </p:sp>
+      <p:sp>
+        <p:nvSpPr>
+          <p:cNvPr id="10" name="TextBox 9"/>
+          <p:cNvSpPr txBox="1"/>
+          <p:nvPr/>
+        </p:nvSpPr>
+        <p:spPr>
+          <a:xfrm>
+            <a:off x="9387596" y="4457700"/>
+            <a:ext cx="2438339" cy="502920"/>
+          </a:xfrm>
+          <a:prstGeom prst="rect">
+            <a:avLst/>
+          </a:prstGeom>
+          <a:noFill/>
+        </p:spPr>
+        <p:txBody>
+          <a:bodyPr wrap="square">
+            <a:spAutoFit/>
+          </a:bodyPr>
+          <a:lstStyle/>
+          <a:p>
+            <a:r>
+              <a:rPr b="1" sz="900">
+                <a:solidFill>
+                  <a:srgbClr val="E31C3D"/>
+                </a:solidFill>
+              </a:rPr>
+              <a:t>VERSION</a:t>
+            </a:r>
+          </a:p>
+          <a:p>
+            <a:r>
+              <a:rPr sz="900"/>
+              <a:t>v3.0</a:t>
+            </a:r>
+          </a:p>
+        </p:txBody>
+      </p:sp>
+      <p:sp>
+        <p:nvSpPr>
+          <p:cNvPr id="11" name="TextBox 10"/>
+          <p:cNvSpPr txBox="1"/>
+          <p:nvPr/>
+        </p:nvSpPr>
+        <p:spPr>
+          <a:xfrm>
+            <a:off x="365760" y="5143500"/>
+            <a:ext cx="11460175" cy="1097280"/>
+          </a:xfrm>
+          <a:prstGeom prst="rect">
+            <a:avLst/>
+          </a:prstGeom>
+          <a:noFill/>
+        </p:spPr>
+        <p:txBody>
+          <a:bodyPr wrap="square">
+            <a:spAutoFit/>
+          </a:bodyPr>
+          <a:lstStyle/>
+          <a:p>
+            <a:r>
+              <a:rPr b="1" sz="900">
+                <a:solidFill>
+                  <a:srgbClr val="E31C3D"/>
+                </a:solidFill>
+              </a:rPr>
+              <a:t>WHAT TO CUSTOMISE</a:t>
+            </a:r>
+          </a:p>
+          <a:p>
+            <a:r>
+              <a:rPr sz="900"/>
+              <a:t>- Replace [Customer Name] on every slide (20+ instances)</a:t>
+            </a:r>
+          </a:p>
+          <a:p>
+            <a:r>
+              <a:rPr sz="900"/>
+              <a:t>- Update all financial figures from your TCO model</a:t>
+            </a:r>
+          </a:p>
+          <a:p>
+            <a:r>
+              <a:rPr sz="900"/>
+              <a:t>- Populate the scoring matrix with your engagement's weighted scores</a:t>
+            </a:r>
+          </a:p>
+          <a:p>
+            <a:r>
+              <a:rPr sz="900"/>
+              <a:t>- Confirm Recommendation slide comes AFTER evidence slides 8-12</a:t>
+            </a:r>
+          </a:p>
+          <a:p>
+            <a:r>
+              <a:rPr sz="900"/>
+              <a:t>- Update partner funding slide with actual AMM/MAP/PSO eligibility</a:t>
+            </a:r>
+          </a:p>
+        </p:txBody>
+      </p:sp>
+      <p:sp>
+        <p:nvSpPr>
+          <p:cNvPr id="12" name="TextBox 11"/>
+          <p:cNvSpPr txBox="1"/>
+          <p:nvPr/>
+        </p:nvSpPr>
+        <p:spPr>
+          <a:xfrm>
+            <a:off x="365760" y="6377940"/>
+            <a:ext cx="11460175" cy="228600"/>
+          </a:xfrm>
+          <a:prstGeom prst="rect">
+            <a:avLst/>
+          </a:prstGeom>
+          <a:noFill/>
+        </p:spPr>
+        <p:txBody>
+          <a:bodyPr wrap="none">
+            <a:spAutoFit/>
+          </a:bodyPr>
+          <a:lstStyle/>
+          <a:p>
+            <a:r>
+              <a:rPr sz="700">
+                <a:solidFill>
+                  <a:srgbClr val="646464"/>
+                </a:solidFill>
+              </a:rPr>
+              <a:t>CRA Framework v2.0 -- Rackspace Cloud Solutions Architecture  |  Confidential  |  (c) 2026 Rackspace Technology</a:t>
             </a:r>
           </a:p>
         </p:txBody>
@@ -31316,4 +34498,324 @@
   </a:objectDefaults>
   <a:extraClrSchemeLst/>
 </a:theme>
+</file>
+
+<file path=ppt/theme/theme2.xml><?xml version="1.0" encoding="utf-8"?>
+<a:theme xmlns:a="http://schemas.openxmlformats.org/drawingml/2006/main" name="Office Theme">
+  <a:themeElements>
+    <a:clrScheme name="Office">
+      <a:dk1>
+        <a:sysClr val="windowText" lastClr="000000"/>
+      </a:dk1>
+      <a:lt1>
+        <a:sysClr val="window" lastClr="FFFFFF"/>
+      </a:lt1>
+      <a:dk2>
+        <a:srgbClr val="1F497D"/>
+      </a:dk2>
+      <a:lt2>
+        <a:srgbClr val="EEECE1"/>
+      </a:lt2>
+      <a:accent1>
+        <a:srgbClr val="4F81BD"/>
+      </a:accent1>
+      <a:accent2>
+        <a:srgbClr val="C0504D"/>
+      </a:accent2>
+      <a:accent3>
+        <a:srgbClr val="9BBB59"/>
+      </a:accent3>
+      <a:accent4>
+        <a:srgbClr val="8064A2"/>
+      </a:accent4>
+      <a:accent5>
+        <a:srgbClr val="4BACC6"/>
+      </a:accent5>
+      <a:accent6>
+        <a:srgbClr val="F79646"/>
+      </a:accent6>
+      <a:hlink>
+        <a:srgbClr val="0000FF"/>
+      </a:hlink>
+      <a:folHlink>
+        <a:srgbClr val="800080"/>
+      </a:folHlink>
+    </a:clrScheme>
+    <a:fontScheme name="Office">
+      <a:majorFont>
+        <a:latin typeface="Calibri"/>
+        <a:ea typeface=""/>
+        <a:cs typeface=""/>
+        <a:font script="Jpan" typeface="ＭＳ Ｐゴシック"/>
+        <a:font script="Hang" typeface="맑은 고딕"/>
+        <a:font script="Hans" typeface="宋体"/>
+        <a:font script="Hant" typeface="新細明體"/>
+        <a:font script="Arab" typeface="Times New Roman"/>
+        <a:font script="Hebr" typeface="Times New Roman"/>
+        <a:font script="Thai" typeface="Angsana New"/>
+        <a:font script="Ethi" typeface="Nyala"/>
+        <a:font script="Beng" typeface="Vrinda"/>
+        <a:font script="Gujr" typeface="Shruti"/>
+        <a:font script="Khmr" typeface="MoolBoran"/>
+        <a:font script="Knda" typeface="Tunga"/>
+        <a:font script="Guru" typeface="Raavi"/>
+        <a:font script="Cans" typeface="Euphemia"/>
+        <a:font script="Cher" typeface="Plantagenet Cherokee"/>
+        <a:font script="Yiii" typeface="Microsoft Yi Baiti"/>
+        <a:font script="Tibt" typeface="Microsoft Himalaya"/>
+        <a:font script="Thaa" typeface="MV Boli"/>
+        <a:font script="Deva" typeface="Mangal"/>
+        <a:font script="Telu" typeface="Gautami"/>
+        <a:font script="Taml" typeface="Latha"/>
+        <a:font script="Syrc" typeface="Estrangelo Edessa"/>
+        <a:font script="Orya" typeface="Kalinga"/>
+        <a:font script="Mlym" typeface="Kartika"/>
+        <a:font script="Laoo" typeface="DokChampa"/>
+        <a:font script="Sinh" typeface="Iskoola Pota"/>
+        <a:font script="Mong" typeface="Mongolian Baiti"/>
+        <a:font script="Viet" typeface="Times New Roman"/>
+        <a:font script="Uigh" typeface="Microsoft Uighur"/>
+        <a:font script="Geor" typeface="Sylfaen"/>
+      </a:majorFont>
+      <a:minorFont>
+        <a:latin typeface="Calibri"/>
+        <a:ea typeface=""/>
+        <a:cs typeface=""/>
+        <a:font script="Jpan" typeface="ＭＳ Ｐゴシック"/>
+        <a:font script="Hang" typeface="맑은 고딕"/>
+        <a:font script="Hans" typeface="宋体"/>
+        <a:font script="Hant" typeface="新細明體"/>
+        <a:font script="Arab" typeface="Arial"/>
+        <a:font script="Hebr" typeface="Arial"/>
+        <a:font script="Thai" typeface="Cordia New"/>
+        <a:font script="Ethi" typeface="Nyala"/>
+        <a:font script="Beng" typeface="Vrinda"/>
+        <a:font script="Gujr" typeface="Shruti"/>
+        <a:font script="Khmr" typeface="DaunPenh"/>
+        <a:font script="Knda" typeface="Tunga"/>
+        <a:font script="Guru" typeface="Raavi"/>
+        <a:font script="Cans" typeface="Euphemia"/>
+        <a:font script="Cher" typeface="Plantagenet Cherokee"/>
+        <a:font script="Yiii" typeface="Microsoft Yi Baiti"/>
+        <a:font script="Tibt" typeface="Microsoft Himalaya"/>
+        <a:font script="Thaa" typeface="MV Boli"/>
+        <a:font script="Deva" typeface="Mangal"/>
+        <a:font script="Telu" typeface="Gautami"/>
+        <a:font script="Taml" typeface="Latha"/>
+        <a:font script="Syrc" typeface="Estrangelo Edessa"/>
+        <a:font script="Orya" typeface="Kalinga"/>
+        <a:font script="Mlym" typeface="Kartika"/>
+        <a:font script="Laoo" typeface="DokChampa"/>
+        <a:font script="Sinh" typeface="Iskoola Pota"/>
+        <a:font script="Mong" typeface="Mongolian Baiti"/>
+        <a:font script="Viet" typeface="Arial"/>
+        <a:font script="Uigh" typeface="Microsoft Uighur"/>
+        <a:font script="Geor" typeface="Sylfaen"/>
+      </a:minorFont>
+    </a:fontScheme>
+    <a:fmtScheme name="Office">
+      <a:fillStyleLst>
+        <a:solidFill>
+          <a:schemeClr val="phClr"/>
+        </a:solidFill>
+        <a:gradFill rotWithShape="1">
+          <a:gsLst>
+            <a:gs pos="0">
+              <a:schemeClr val="phClr">
+                <a:tint val="50000"/>
+                <a:satMod val="300000"/>
+              </a:schemeClr>
+            </a:gs>
+            <a:gs pos="35000">
+              <a:schemeClr val="phClr">
+                <a:tint val="37000"/>
+                <a:satMod val="300000"/>
+              </a:schemeClr>
+            </a:gs>
+            <a:gs pos="100000">
+              <a:schemeClr val="phClr">
+                <a:tint val="15000"/>
+                <a:satMod val="350000"/>
+              </a:schemeClr>
+            </a:gs>
+          </a:gsLst>
+          <a:lin ang="16200000" scaled="1"/>
+        </a:gradFill>
+        <a:gradFill rotWithShape="1">
+          <a:gsLst>
+            <a:gs pos="0">
+              <a:schemeClr val="phClr">
+                <a:tint val="100000"/>
+                <a:shade val="100000"/>
+                <a:satMod val="130000"/>
+              </a:schemeClr>
+            </a:gs>
+            <a:gs pos="100000">
+              <a:schemeClr val="phClr">
+                <a:tint val="50000"/>
+                <a:shade val="100000"/>
+                <a:satMod val="350000"/>
+              </a:schemeClr>
+            </a:gs>
+          </a:gsLst>
+          <a:lin ang="16200000" scaled="0"/>
+        </a:gradFill>
+      </a:fillStyleLst>
+      <a:lnStyleLst>
+        <a:ln w="9525" cap="flat" cmpd="sng" algn="ctr">
+          <a:solidFill>
+            <a:schemeClr val="phClr">
+              <a:shade val="95000"/>
+              <a:satMod val="105000"/>
+            </a:schemeClr>
+          </a:solidFill>
+          <a:prstDash val="solid"/>
+        </a:ln>
+        <a:ln w="25400" cap="flat" cmpd="sng" algn="ctr">
+          <a:solidFill>
+            <a:schemeClr val="phClr"/>
+          </a:solidFill>
+          <a:prstDash val="solid"/>
+        </a:ln>
+        <a:ln w="38100" cap="flat" cmpd="sng" algn="ctr">
+          <a:solidFill>
+            <a:schemeClr val="phClr"/>
+          </a:solidFill>
+          <a:prstDash val="solid"/>
+        </a:ln>
+      </a:lnStyleLst>
+      <a:effectStyleLst>
+        <a:effectStyle>
+          <a:effectLst>
+            <a:outerShdw blurRad="40000" dist="20000" dir="5400000" rotWithShape="0">
+              <a:srgbClr val="000000">
+                <a:alpha val="38000"/>
+              </a:srgbClr>
+            </a:outerShdw>
+          </a:effectLst>
+        </a:effectStyle>
+        <a:effectStyle>
+          <a:effectLst>
+            <a:outerShdw blurRad="40000" dist="23000" dir="5400000" rotWithShape="0">
+              <a:srgbClr val="000000">
+                <a:alpha val="35000"/>
+              </a:srgbClr>
+            </a:outerShdw>
+          </a:effectLst>
+        </a:effectStyle>
+        <a:effectStyle>
+          <a:effectLst>
+            <a:outerShdw blurRad="40000" dist="23000" dir="5400000" rotWithShape="0">
+              <a:srgbClr val="000000">
+                <a:alpha val="35000"/>
+              </a:srgbClr>
+            </a:outerShdw>
+          </a:effectLst>
+          <a:scene3d>
+            <a:camera prst="orthographicFront">
+              <a:rot lat="0" lon="0" rev="0"/>
+            </a:camera>
+            <a:lightRig rig="threePt" dir="t">
+              <a:rot lat="0" lon="0" rev="1200000"/>
+            </a:lightRig>
+          </a:scene3d>
+          <a:sp3d>
+            <a:bevelT w="63500" h="25400"/>
+          </a:sp3d>
+        </a:effectStyle>
+      </a:effectStyleLst>
+      <a:bgFillStyleLst>
+        <a:solidFill>
+          <a:schemeClr val="phClr"/>
+        </a:solidFill>
+        <a:gradFill rotWithShape="1">
+          <a:gsLst>
+            <a:gs pos="0">
+              <a:schemeClr val="phClr">
+                <a:tint val="40000"/>
+                <a:satMod val="350000"/>
+              </a:schemeClr>
+            </a:gs>
+            <a:gs pos="40000">
+              <a:schemeClr val="phClr">
+                <a:tint val="45000"/>
+                <a:shade val="99000"/>
+                <a:satMod val="350000"/>
+              </a:schemeClr>
+            </a:gs>
+            <a:gs pos="100000">
+              <a:schemeClr val="phClr">
+                <a:shade val="20000"/>
+                <a:satMod val="255000"/>
+              </a:schemeClr>
+            </a:gs>
+          </a:gsLst>
+          <a:path path="circle">
+            <a:fillToRect l="50000" t="-80000" r="50000" b="180000"/>
+          </a:path>
+        </a:gradFill>
+        <a:gradFill rotWithShape="1">
+          <a:gsLst>
+            <a:gs pos="0">
+              <a:schemeClr val="phClr">
+                <a:tint val="80000"/>
+                <a:satMod val="300000"/>
+              </a:schemeClr>
+            </a:gs>
+            <a:gs pos="100000">
+              <a:schemeClr val="phClr">
+                <a:shade val="30000"/>
+                <a:satMod val="200000"/>
+              </a:schemeClr>
+            </a:gs>
+          </a:gsLst>
+          <a:path path="circle">
+            <a:fillToRect l="50000" t="50000" r="50000" b="50000"/>
+          </a:path>
+        </a:gradFill>
+      </a:bgFillStyleLst>
+    </a:fmtScheme>
+  </a:themeElements>
+  <a:objectDefaults>
+    <a:spDef>
+      <a:spPr/>
+      <a:bodyPr/>
+      <a:lstStyle/>
+      <a:style>
+        <a:lnRef idx="1">
+          <a:schemeClr val="accent1"/>
+        </a:lnRef>
+        <a:fillRef idx="3">
+          <a:schemeClr val="accent1"/>
+        </a:fillRef>
+        <a:effectRef idx="2">
+          <a:schemeClr val="accent1"/>
+        </a:effectRef>
+        <a:fontRef idx="minor">
+          <a:schemeClr val="lt1"/>
+        </a:fontRef>
+      </a:style>
+    </a:spDef>
+    <a:lnDef>
+      <a:spPr/>
+      <a:bodyPr/>
+      <a:lstStyle/>
+      <a:style>
+        <a:lnRef idx="2">
+          <a:schemeClr val="accent1"/>
+        </a:lnRef>
+        <a:fillRef idx="0">
+          <a:schemeClr val="accent1"/>
+        </a:fillRef>
+        <a:effectRef idx="1">
+          <a:schemeClr val="accent1"/>
+        </a:effectRef>
+        <a:fontRef idx="minor">
+          <a:schemeClr val="tx1"/>
+        </a:fontRef>
+      </a:style>
+    </a:lnDef>
+  </a:objectDefaults>
+  <a:extraClrSchemeLst/>
+</a:theme>
 </file>
--- a/Templates/executive-reporting/cra-executive-summary-v3.pptx
+++ b/Templates/executive-reporting/cra-executive-summary-v3.pptx
@@ -4211,7 +4211,7 @@
         <a:spcBef>
           <a:spcPct val="20000"/>
         </a:spcBef>
-        <a:buFont typeface="Arial"/>
+        <a:buFont typeface="Aktiv Grotesk"/>
         <a:buChar char="•"/>
         <a:defRPr sz="3200" kern="1200">
           <a:solidFill>
@@ -4226,7 +4226,7 @@
         <a:spcBef>
           <a:spcPct val="20000"/>
         </a:spcBef>
-        <a:buFont typeface="Arial"/>
+        <a:buFont typeface="Aktiv Grotesk"/>
         <a:buChar char="–"/>
         <a:defRPr sz="2800" kern="1200">
           <a:solidFill>
@@ -4241,7 +4241,7 @@
         <a:spcBef>
           <a:spcPct val="20000"/>
         </a:spcBef>
-        <a:buFont typeface="Arial"/>
+        <a:buFont typeface="Aktiv Grotesk"/>
         <a:buChar char="•"/>
         <a:defRPr sz="2400" kern="1200">
           <a:solidFill>
@@ -4256,7 +4256,7 @@
         <a:spcBef>
           <a:spcPct val="20000"/>
         </a:spcBef>
-        <a:buFont typeface="Arial"/>
+        <a:buFont typeface="Aktiv Grotesk"/>
         <a:buChar char="–"/>
         <a:defRPr sz="2000" kern="1200">
           <a:solidFill>
@@ -4271,7 +4271,7 @@
         <a:spcBef>
           <a:spcPct val="20000"/>
         </a:spcBef>
-        <a:buFont typeface="Arial"/>
+        <a:buFont typeface="Aktiv Grotesk"/>
         <a:buChar char="»"/>
         <a:defRPr sz="2000" kern="1200">
           <a:solidFill>
@@ -4286,7 +4286,7 @@
         <a:spcBef>
           <a:spcPct val="20000"/>
         </a:spcBef>
-        <a:buFont typeface="Arial"/>
+        <a:buFont typeface="Aktiv Grotesk"/>
         <a:buChar char="•"/>
         <a:defRPr sz="2000" kern="1200">
           <a:solidFill>
@@ -4301,7 +4301,7 @@
         <a:spcBef>
           <a:spcPct val="20000"/>
         </a:spcBef>
-        <a:buFont typeface="Arial"/>
+        <a:buFont typeface="Aktiv Grotesk"/>
         <a:buChar char="•"/>
         <a:defRPr sz="2000" kern="1200">
           <a:solidFill>
@@ -4316,7 +4316,7 @@
         <a:spcBef>
           <a:spcPct val="20000"/>
         </a:spcBef>
-        <a:buFont typeface="Arial"/>
+        <a:buFont typeface="Aktiv Grotesk"/>
         <a:buChar char="•"/>
         <a:defRPr sz="2000" kern="1200">
           <a:solidFill>
@@ -4331,7 +4331,7 @@
         <a:spcBef>
           <a:spcPct val="20000"/>
         </a:spcBef>
-        <a:buFont typeface="Arial"/>
+        <a:buFont typeface="Aktiv Grotesk"/>
         <a:buChar char="•"/>
         <a:defRPr sz="2000" kern="1200">
           <a:solidFill>
@@ -35255,7 +35255,7 @@
     </a:clrScheme>
     <a:fontScheme name="Office">
       <a:majorFont>
-        <a:latin typeface="Calibri"/>
+        <a:latin typeface="Aktiv Grotesk"/>
         <a:ea typeface=""/>
         <a:cs typeface=""/>
         <a:font script="Jpan" typeface="ＭＳ Ｐゴシック"/>
@@ -35290,15 +35290,15 @@
         <a:font script="Geor" typeface="Sylfaen"/>
       </a:majorFont>
       <a:minorFont>
-        <a:latin typeface="Calibri"/>
+        <a:latin typeface="Aktiv Grotesk"/>
         <a:ea typeface=""/>
         <a:cs typeface=""/>
         <a:font script="Jpan" typeface="ＭＳ Ｐゴシック"/>
         <a:font script="Hang" typeface="맑은 고딕"/>
         <a:font script="Hans" typeface="宋体"/>
         <a:font script="Hant" typeface="新細明體"/>
-        <a:font script="Arab" typeface="Arial"/>
-        <a:font script="Hebr" typeface="Arial"/>
+        <a:font script="Arab" typeface="Aktiv Grotesk"/>
+        <a:font script="Hebr" typeface="Aktiv Grotesk"/>
         <a:font script="Thai" typeface="Cordia New"/>
         <a:font script="Ethi" typeface="Nyala"/>
         <a:font script="Beng" typeface="Vrinda"/>
@@ -35320,7 +35320,7 @@
         <a:font script="Laoo" typeface="DokChampa"/>
         <a:font script="Sinh" typeface="Iskoola Pota"/>
         <a:font script="Mong" typeface="Mongolian Baiti"/>
-        <a:font script="Viet" typeface="Arial"/>
+        <a:font script="Viet" typeface="Aktiv Grotesk"/>
         <a:font script="Uigh" typeface="Microsoft Uighur"/>
         <a:font script="Geor" typeface="Sylfaen"/>
       </a:minorFont>
@@ -35575,7 +35575,7 @@
     </a:clrScheme>
     <a:fontScheme name="Office">
       <a:majorFont>
-        <a:latin typeface="Calibri"/>
+        <a:latin typeface="Aktiv Grotesk"/>
         <a:ea typeface=""/>
         <a:cs typeface=""/>
         <a:font script="Jpan" typeface="ＭＳ Ｐゴシック"/>
@@ -35610,15 +35610,15 @@
         <a:font script="Geor" typeface="Sylfaen"/>
       </a:majorFont>
       <a:minorFont>
-        <a:latin typeface="Calibri"/>
+        <a:latin typeface="Aktiv Grotesk"/>
         <a:ea typeface=""/>
         <a:cs typeface=""/>
         <a:font script="Jpan" typeface="ＭＳ Ｐゴシック"/>
         <a:font script="Hang" typeface="맑은 고딕"/>
         <a:font script="Hans" typeface="宋体"/>
         <a:font script="Hant" typeface="新細明體"/>
-        <a:font script="Arab" typeface="Arial"/>
-        <a:font script="Hebr" typeface="Arial"/>
+        <a:font script="Arab" typeface="Aktiv Grotesk"/>
+        <a:font script="Hebr" typeface="Aktiv Grotesk"/>
         <a:font script="Thai" typeface="Cordia New"/>
         <a:font script="Ethi" typeface="Nyala"/>
         <a:font script="Beng" typeface="Vrinda"/>
@@ -35640,7 +35640,7 @@
         <a:font script="Laoo" typeface="DokChampa"/>
         <a:font script="Sinh" typeface="Iskoola Pota"/>
         <a:font script="Mong" typeface="Mongolian Baiti"/>
-        <a:font script="Viet" typeface="Arial"/>
+        <a:font script="Viet" typeface="Aktiv Grotesk"/>
         <a:font script="Uigh" typeface="Microsoft Uighur"/>
         <a:font script="Geor" typeface="Sylfaen"/>
       </a:minorFont>
